--- a/Modelos_Pronostico.pptx
+++ b/Modelos_Pronostico.pptx
@@ -4,8 +4,11 @@
   <p:sldMasterIdLst>
     <p:sldMasterId id="2147483648" r:id="rId1"/>
   </p:sldMasterIdLst>
+  <p:notesMasterIdLst>
+    <p:notesMasterId r:id="rId17"/>
+  </p:notesMasterIdLst>
   <p:sldIdLst>
-    <p:sldId id="256" r:id="rId2"/>
+    <p:sldId id="405" r:id="rId2"/>
     <p:sldId id="257" r:id="rId3"/>
     <p:sldId id="258" r:id="rId4"/>
     <p:sldId id="259" r:id="rId5"/>
@@ -21,10 +24,7 @@
     <p:sldId id="269" r:id="rId15"/>
     <p:sldId id="270" r:id="rId16"/>
   </p:sldIdLst>
-  <p:notesMasterIdLst>
-    <p:notesMasterId r:id="rId17"/>
-  </p:notesMasterIdLst>
-  <p:sldSz cx="9144000" cy="5143500"/>
+  <p:sldSz cx="9144000" cy="5143500" type="screen16x9"/>
   <p:notesSz cx="5143500" cy="9144000"/>
   <p:defaultTextStyle>
     <a:lvl1pPr marL="0" algn="l" defTabSz="914400" rtl="0" eaLnBrk="1" latinLnBrk="0" hangingPunct="1">
@@ -118,7 +118,96 @@
       </a:defRPr>
     </a:lvl9pPr>
   </p:defaultTextStyle>
+  <p:extLst>
+    <p:ext uri="{EFAFB233-063F-42B5-8137-9DF3F51BA10A}">
+      <p15:sldGuideLst xmlns:p15="http://schemas.microsoft.com/office/powerpoint/2012/main"/>
+    </p:ext>
+  </p:extLst>
 </p:presentation>
+</file>
+
+<file path=ppt/revisionInfo.xml><?xml version="1.0" encoding="utf-8"?>
+<p1510:revInfo xmlns:a="http://schemas.openxmlformats.org/drawingml/2006/main" xmlns:r="http://schemas.openxmlformats.org/officeDocument/2006/relationships" xmlns:p1510="http://schemas.microsoft.com/office/powerpoint/2015/10/main">
+  <p1510:revLst>
+    <p1510:client id="{2F24C379-B777-4F85-8B3D-3642E5850AD9}" v="1" dt="2025-11-12T16:09:52.541"/>
+  </p1510:revLst>
+</p1510:revInfo>
+</file>
+
+<file path=ppt/changesInfos/changesInfo1.xml><?xml version="1.0" encoding="utf-8"?>
+<pc:chgInfo xmlns:a="http://schemas.openxmlformats.org/drawingml/2006/main" xmlns:r="http://schemas.openxmlformats.org/officeDocument/2006/relationships" xmlns:ac="http://schemas.microsoft.com/office/drawing/2013/main/command" xmlns:pc="http://schemas.microsoft.com/office/powerpoint/2013/main/command">
+  <pc:docChgLst>
+    <pc:chgData name="Ximena Silva" userId="5f15395a9ed9a48f" providerId="LiveId" clId="{A1A69B6A-B6E8-475B-B39A-A7D0D0DD385B}"/>
+    <pc:docChg chg="undo custSel addSld delSld modSld sldOrd">
+      <pc:chgData name="Ximena Silva" userId="5f15395a9ed9a48f" providerId="LiveId" clId="{A1A69B6A-B6E8-475B-B39A-A7D0D0DD385B}" dt="2025-11-12T16:12:56.620" v="98" actId="47"/>
+      <pc:docMkLst>
+        <pc:docMk/>
+      </pc:docMkLst>
+      <pc:sldChg chg="addSp delSp modSp del mod">
+        <pc:chgData name="Ximena Silva" userId="5f15395a9ed9a48f" providerId="LiveId" clId="{A1A69B6A-B6E8-475B-B39A-A7D0D0DD385B}" dt="2025-11-12T16:12:56.620" v="98" actId="47"/>
+        <pc:sldMkLst>
+          <pc:docMk/>
+          <pc:sldMk cId="0" sldId="256"/>
+        </pc:sldMkLst>
+        <pc:spChg chg="del">
+          <ac:chgData name="Ximena Silva" userId="5f15395a9ed9a48f" providerId="LiveId" clId="{A1A69B6A-B6E8-475B-B39A-A7D0D0DD385B}" dt="2025-11-12T16:04:02.469" v="0" actId="478"/>
+          <ac:spMkLst>
+            <pc:docMk/>
+            <pc:sldMk cId="0" sldId="256"/>
+            <ac:spMk id="3" creationId="{00000000-0000-0000-0000-000000000000}"/>
+          </ac:spMkLst>
+        </pc:spChg>
+        <pc:spChg chg="mod">
+          <ac:chgData name="Ximena Silva" userId="5f15395a9ed9a48f" providerId="LiveId" clId="{A1A69B6A-B6E8-475B-B39A-A7D0D0DD385B}" dt="2025-11-12T16:04:06.210" v="2" actId="20577"/>
+          <ac:spMkLst>
+            <pc:docMk/>
+            <pc:sldMk cId="0" sldId="256"/>
+            <ac:spMk id="5" creationId="{00000000-0000-0000-0000-000000000000}"/>
+          </ac:spMkLst>
+        </pc:spChg>
+        <pc:spChg chg="add del">
+          <ac:chgData name="Ximena Silva" userId="5f15395a9ed9a48f" providerId="LiveId" clId="{A1A69B6A-B6E8-475B-B39A-A7D0D0DD385B}" dt="2025-11-12T16:09:48.410" v="4" actId="22"/>
+          <ac:spMkLst>
+            <pc:docMk/>
+            <pc:sldMk cId="0" sldId="256"/>
+            <ac:spMk id="7" creationId="{47DEFEA3-5E14-DD82-7EC8-67F06971229C}"/>
+          </ac:spMkLst>
+        </pc:spChg>
+      </pc:sldChg>
+      <pc:sldChg chg="addSp delSp modSp add mod ord">
+        <pc:chgData name="Ximena Silva" userId="5f15395a9ed9a48f" providerId="LiveId" clId="{A1A69B6A-B6E8-475B-B39A-A7D0D0DD385B}" dt="2025-11-12T16:12:52.214" v="97" actId="404"/>
+        <pc:sldMkLst>
+          <pc:docMk/>
+          <pc:sldMk cId="1397344631" sldId="405"/>
+        </pc:sldMkLst>
+        <pc:spChg chg="del">
+          <ac:chgData name="Ximena Silva" userId="5f15395a9ed9a48f" providerId="LiveId" clId="{A1A69B6A-B6E8-475B-B39A-A7D0D0DD385B}" dt="2025-11-12T16:09:57.524" v="8" actId="478"/>
+          <ac:spMkLst>
+            <pc:docMk/>
+            <pc:sldMk cId="1397344631" sldId="405"/>
+            <ac:spMk id="2" creationId="{FF33BA24-1EB3-99A2-CC3F-FF5AE6598D2B}"/>
+          </ac:spMkLst>
+        </pc:spChg>
+        <pc:spChg chg="mod">
+          <ac:chgData name="Ximena Silva" userId="5f15395a9ed9a48f" providerId="LiveId" clId="{A1A69B6A-B6E8-475B-B39A-A7D0D0DD385B}" dt="2025-11-12T16:11:03.408" v="72" actId="14100"/>
+          <ac:spMkLst>
+            <pc:docMk/>
+            <pc:sldMk cId="1397344631" sldId="405"/>
+            <ac:spMk id="4" creationId="{55C6C1DE-B6C1-999A-B801-56C24ACE1C8E}"/>
+          </ac:spMkLst>
+        </pc:spChg>
+        <pc:spChg chg="add mod">
+          <ac:chgData name="Ximena Silva" userId="5f15395a9ed9a48f" providerId="LiveId" clId="{A1A69B6A-B6E8-475B-B39A-A7D0D0DD385B}" dt="2025-11-12T16:12:52.214" v="97" actId="404"/>
+          <ac:spMkLst>
+            <pc:docMk/>
+            <pc:sldMk cId="1397344631" sldId="405"/>
+            <ac:spMk id="5" creationId="{AB39384A-FEA1-79C6-F020-6520EBFB3592}"/>
+          </ac:spMkLst>
+        </pc:spChg>
+      </pc:sldChg>
+    </pc:docChg>
+  </pc:docChgLst>
+</pc:chgInfo>
 </file>
 
 <file path=ppt/notesMasters/notesMaster1.xml><?xml version="1.0" encoding="utf-8"?>
@@ -143,234 +232,10 @@
           <a:chExt cx="0" cy="0"/>
         </a:xfrm>
       </p:grpSpPr>
-      <p:sp>
-        <p:nvSpPr>
-          <p:cNvPr id="2" name="Header Placeholder 1"/>
-          <p:cNvSpPr>
-            <a:spLocks noGrp="1"/>
-          </p:cNvSpPr>
-          <p:nvPr>
-            <p:ph type="hdr" sz="quarter"/>
-          </p:nvPr>
-        </p:nvSpPr>
-        <p:spPr>
-          <a:xfrm>
-            <a:off x="0" y="0"/>
-            <a:ext cx="2971800" cy="458788"/>
-          </a:xfrm>
-          <a:prstGeom prst="rect">
-            <a:avLst/>
-          </a:prstGeom>
-        </p:spPr>
-        <p:txBody>
-          <a:bodyPr vert="horz" lIns="91440" tIns="45720" rIns="91440" bIns="45720" rtlCol="0"/>
-          <a:lstStyle>
-            <a:lvl1pPr algn="l">
-              <a:defRPr sz="1200"/>
-            </a:lvl1pPr>
-          </a:lstStyle>
-          <a:p>
-            <a:endParaRPr lang="en-US"/>
-          </a:p>
-        </p:txBody>
-      </p:sp>
-      <p:sp>
-        <p:nvSpPr>
-          <p:cNvPr id="3" name="Date Placeholder 2"/>
-          <p:cNvSpPr>
-            <a:spLocks noGrp="1"/>
-          </p:cNvSpPr>
-          <p:nvPr>
-            <p:ph type="dt" idx="1"/>
-          </p:nvPr>
-        </p:nvSpPr>
-        <p:spPr>
-          <a:xfrm>
-            <a:off x="3884613" y="0"/>
-            <a:ext cx="2971800" cy="458788"/>
-          </a:xfrm>
-          <a:prstGeom prst="rect">
-            <a:avLst/>
-          </a:prstGeom>
-        </p:spPr>
-        <p:txBody>
-          <a:bodyPr vert="horz" lIns="91440" tIns="45720" rIns="91440" bIns="45720" rtlCol="0"/>
-          <a:lstStyle>
-            <a:lvl1pPr algn="r">
-              <a:defRPr sz="1200"/>
-            </a:lvl1pPr>
-          </a:lstStyle>
-          <a:p>
-            <a:fld id="{5282F153-3F37-0F45-9E97-73ACFA13230C}" type="datetimeFigureOut">
-              <a:rPr lang="en-US"/>
-              <a:t>7/23/19</a:t>
-            </a:fld>
-            <a:endParaRPr lang="en-US"/>
-          </a:p>
-        </p:txBody>
-      </p:sp>
-      <p:sp>
-        <p:nvSpPr>
-          <p:cNvPr id="4" name="Slide Image Placeholder 3"/>
-          <p:cNvSpPr>
-            <a:spLocks noGrp="1" noRot="1" noChangeAspect="1"/>
-          </p:cNvSpPr>
-          <p:nvPr>
-            <p:ph type="sldImg" idx="2"/>
-          </p:nvPr>
-        </p:nvSpPr>
-        <p:spPr>
-          <a:xfrm>
-            <a:off x="685800" y="1143000"/>
-            <a:ext cx="5486400" cy="3086100"/>
-          </a:xfrm>
-          <a:prstGeom prst="rect">
-            <a:avLst/>
-          </a:prstGeom>
-          <a:noFill/>
-          <a:ln w="12700">
-            <a:solidFill>
-              <a:prstClr val="black"/>
-            </a:solidFill>
-          </a:ln>
-        </p:spPr>
-        <p:txBody>
-          <a:bodyPr vert="horz" lIns="91440" tIns="45720" rIns="91440" bIns="45720" rtlCol="0" anchor="ctr"/>
-          <a:lstStyle/>
-          <a:p>
-            <a:endParaRPr lang="en-US"/>
-          </a:p>
-        </p:txBody>
-      </p:sp>
-      <p:sp>
-        <p:nvSpPr>
-          <p:cNvPr id="5" name="Notes Placeholder 4"/>
-          <p:cNvSpPr>
-            <a:spLocks noGrp="1"/>
-          </p:cNvSpPr>
-          <p:nvPr>
-            <p:ph type="body" sz="quarter" idx="3"/>
-          </p:nvPr>
-        </p:nvSpPr>
-        <p:spPr>
-          <a:xfrm>
-            <a:off x="685800" y="4400550"/>
-            <a:ext cx="5486400" cy="3600450"/>
-          </a:xfrm>
-          <a:prstGeom prst="rect">
-            <a:avLst/>
-          </a:prstGeom>
-        </p:spPr>
-        <p:txBody>
-          <a:bodyPr vert="horz" lIns="91440" tIns="45720" rIns="91440" bIns="45720" rtlCol="0"/>
-          <a:lstStyle/>
-          <a:p>
-            <a:pPr lvl="0"/>
-            <a:r>
-              <a:rPr lang="en-US"/>
-              <a:t>Click to edit Master text styles</a:t>
-            </a:r>
-          </a:p>
-          <a:p>
-            <a:pPr lvl="1"/>
-            <a:r>
-              <a:rPr lang="en-US"/>
-              <a:t>Second level</a:t>
-            </a:r>
-          </a:p>
-          <a:p>
-            <a:pPr lvl="2"/>
-            <a:r>
-              <a:rPr lang="en-US"/>
-              <a:t>Third level</a:t>
-            </a:r>
-          </a:p>
-          <a:p>
-            <a:pPr lvl="3"/>
-            <a:r>
-              <a:rPr lang="en-US"/>
-              <a:t>Fourth level</a:t>
-            </a:r>
-          </a:p>
-          <a:p>
-            <a:pPr lvl="4"/>
-            <a:r>
-              <a:rPr lang="en-US"/>
-              <a:t>Fifth level</a:t>
-            </a:r>
-          </a:p>
-        </p:txBody>
-      </p:sp>
-      <p:sp>
-        <p:nvSpPr>
-          <p:cNvPr id="6" name="Footer Placeholder 5"/>
-          <p:cNvSpPr>
-            <a:spLocks noGrp="1"/>
-          </p:cNvSpPr>
-          <p:nvPr>
-            <p:ph type="ftr" sz="quarter" idx="4"/>
-          </p:nvPr>
-        </p:nvSpPr>
-        <p:spPr>
-          <a:xfrm>
-            <a:off x="0" y="8685213"/>
-            <a:ext cx="2971800" cy="458787"/>
-          </a:xfrm>
-          <a:prstGeom prst="rect">
-            <a:avLst/>
-          </a:prstGeom>
-        </p:spPr>
-        <p:txBody>
-          <a:bodyPr vert="horz" lIns="91440" tIns="45720" rIns="91440" bIns="45720" rtlCol="0" anchor="b"/>
-          <a:lstStyle>
-            <a:lvl1pPr algn="l">
-              <a:defRPr sz="1200"/>
-            </a:lvl1pPr>
-          </a:lstStyle>
-          <a:p>
-            <a:endParaRPr lang="en-US"/>
-          </a:p>
-        </p:txBody>
-      </p:sp>
-      <p:sp>
-        <p:nvSpPr>
-          <p:cNvPr id="7" name="Slide Number Placeholder 6"/>
-          <p:cNvSpPr>
-            <a:spLocks noGrp="1"/>
-          </p:cNvSpPr>
-          <p:nvPr>
-            <p:ph type="sldNum" sz="quarter" idx="5"/>
-          </p:nvPr>
-        </p:nvSpPr>
-        <p:spPr>
-          <a:xfrm>
-            <a:off x="3884613" y="8685213"/>
-            <a:ext cx="2971800" cy="458787"/>
-          </a:xfrm>
-          <a:prstGeom prst="rect">
-            <a:avLst/>
-          </a:prstGeom>
-        </p:spPr>
-        <p:txBody>
-          <a:bodyPr vert="horz" lIns="91440" tIns="45720" rIns="91440" bIns="45720" rtlCol="0" anchor="b"/>
-          <a:lstStyle>
-            <a:lvl1pPr algn="r">
-              <a:defRPr sz="1200"/>
-            </a:lvl1pPr>
-          </a:lstStyle>
-          <a:p>
-            <a:fld id="{CE5E9CC1-C706-0F49-92D6-E571CC5EEA8F}" type="slidenum">
-              <a:rPr lang="en-US"/>
-              <a:t>‹#›</a:t>
-            </a:fld>
-            <a:endParaRPr lang="en-US"/>
-          </a:p>
-        </p:txBody>
-      </p:sp>
     </p:spTree>
     <p:extLst>
       <p:ext uri="{BB962C8B-B14F-4D97-AF65-F5344CB8AC3E}">
-        <p14:creationId xmlns:p14="http://schemas.microsoft.com/office/powerpoint/2010/main" val="1024086991"/>
+        <p14:creationId xmlns:p14="http://schemas.microsoft.com/office/powerpoint/2010/main" val="2495602547"/>
       </p:ext>
     </p:extLst>
   </p:cSld>
@@ -514,10 +379,6 @@
           <a:bodyPr/>
           <a:lstStyle/>
           <a:p>
-            <a:r>
-              <a:rPr lang="en-US" dirty="0"/>
-              <a:t/>
-            </a:r>
             <a:endParaRPr lang="en-US" dirty="0"/>
           </a:p>
         </p:txBody>
@@ -539,7 +400,7 @@
           <a:p>
             <a:fld id="{F7021451-1387-4CA6-816F-3879F97B5CBC}" type="slidenum">
               <a:rPr lang="en-US"/>
-              <a:t>1</a:t>
+              <a:t>2</a:t>
             </a:fld>
             <a:endParaRPr lang="en-US"/>
           </a:p>
@@ -602,10 +463,6 @@
           <a:bodyPr/>
           <a:lstStyle/>
           <a:p>
-            <a:r>
-              <a:rPr lang="en-US" dirty="0"/>
-              <a:t/>
-            </a:r>
             <a:endParaRPr lang="en-US" dirty="0"/>
           </a:p>
         </p:txBody>
@@ -627,7 +484,7 @@
           <a:p>
             <a:fld id="{F7021451-1387-4CA6-816F-3879F97B5CBC}" type="slidenum">
               <a:rPr lang="en-US"/>
-              <a:t>10</a:t>
+              <a:t>11</a:t>
             </a:fld>
             <a:endParaRPr lang="en-US"/>
           </a:p>
@@ -690,10 +547,6 @@
           <a:bodyPr/>
           <a:lstStyle/>
           <a:p>
-            <a:r>
-              <a:rPr lang="en-US" dirty="0"/>
-              <a:t/>
-            </a:r>
             <a:endParaRPr lang="en-US" dirty="0"/>
           </a:p>
         </p:txBody>
@@ -715,7 +568,7 @@
           <a:p>
             <a:fld id="{F7021451-1387-4CA6-816F-3879F97B5CBC}" type="slidenum">
               <a:rPr lang="en-US"/>
-              <a:t>11</a:t>
+              <a:t>12</a:t>
             </a:fld>
             <a:endParaRPr lang="en-US"/>
           </a:p>
@@ -778,10 +631,6 @@
           <a:bodyPr/>
           <a:lstStyle/>
           <a:p>
-            <a:r>
-              <a:rPr lang="en-US" dirty="0"/>
-              <a:t/>
-            </a:r>
             <a:endParaRPr lang="en-US" dirty="0"/>
           </a:p>
         </p:txBody>
@@ -803,7 +652,7 @@
           <a:p>
             <a:fld id="{F7021451-1387-4CA6-816F-3879F97B5CBC}" type="slidenum">
               <a:rPr lang="en-US"/>
-              <a:t>12</a:t>
+              <a:t>13</a:t>
             </a:fld>
             <a:endParaRPr lang="en-US"/>
           </a:p>
@@ -866,10 +715,6 @@
           <a:bodyPr/>
           <a:lstStyle/>
           <a:p>
-            <a:r>
-              <a:rPr lang="en-US" dirty="0"/>
-              <a:t/>
-            </a:r>
             <a:endParaRPr lang="en-US" dirty="0"/>
           </a:p>
         </p:txBody>
@@ -891,7 +736,7 @@
           <a:p>
             <a:fld id="{F7021451-1387-4CA6-816F-3879F97B5CBC}" type="slidenum">
               <a:rPr lang="en-US"/>
-              <a:t>13</a:t>
+              <a:t>14</a:t>
             </a:fld>
             <a:endParaRPr lang="en-US"/>
           </a:p>
@@ -954,98 +799,6 @@
           <a:bodyPr/>
           <a:lstStyle/>
           <a:p>
-            <a:r>
-              <a:rPr lang="en-US" dirty="0"/>
-              <a:t/>
-            </a:r>
-            <a:endParaRPr lang="en-US" dirty="0"/>
-          </a:p>
-        </p:txBody>
-      </p:sp>
-      <p:sp>
-        <p:nvSpPr>
-          <p:cNvPr id="4" name="Slide Number Placeholder 3"/>
-          <p:cNvSpPr>
-            <a:spLocks noGrp="1"/>
-          </p:cNvSpPr>
-          <p:nvPr>
-            <p:ph type="sldNum" sz="quarter" idx="10"/>
-          </p:nvPr>
-        </p:nvSpPr>
-        <p:spPr/>
-        <p:txBody>
-          <a:bodyPr/>
-          <a:lstStyle/>
-          <a:p>
-            <a:fld id="{F7021451-1387-4CA6-816F-3879F97B5CBC}" type="slidenum">
-              <a:rPr lang="en-US"/>
-              <a:t>14</a:t>
-            </a:fld>
-            <a:endParaRPr lang="en-US"/>
-          </a:p>
-        </p:txBody>
-      </p:sp>
-    </p:spTree>
-    <p:extLst>
-      <p:ext uri="{BB962C8B-B14F-4D97-AF65-F5344CB8AC3E}">
-        <p14:creationId xmlns:p14="http://schemas.microsoft.com/office/powerpoint/2010/main" val="1024086991"/>
-      </p:ext>
-    </p:extLst>
-  </p:cSld>
-  <p:clrMapOvr>
-    <a:masterClrMapping/>
-  </p:clrMapOvr>
-</p:notes>
-</file>
-
-<file path=ppt/notesSlides/notesSlide15.xml><?xml version="1.0" encoding="utf-8"?>
-<p:notes xmlns:a="http://schemas.openxmlformats.org/drawingml/2006/main" xmlns:r="http://schemas.openxmlformats.org/officeDocument/2006/relationships" xmlns:p="http://schemas.openxmlformats.org/presentationml/2006/main">
-  <p:cSld>
-    <p:spTree>
-      <p:nvGrpSpPr>
-        <p:cNvPr id="1" name=""/>
-        <p:cNvGrpSpPr/>
-        <p:nvPr/>
-      </p:nvGrpSpPr>
-      <p:grpSpPr>
-        <a:xfrm>
-          <a:off x="0" y="0"/>
-          <a:ext cx="0" cy="0"/>
-          <a:chOff x="0" y="0"/>
-          <a:chExt cx="0" cy="0"/>
-        </a:xfrm>
-      </p:grpSpPr>
-      <p:sp>
-        <p:nvSpPr>
-          <p:cNvPr id="2" name="Slide Image Placeholder 1"/>
-          <p:cNvSpPr>
-            <a:spLocks noGrp="1" noRot="1" noChangeAspect="1"/>
-          </p:cNvSpPr>
-          <p:nvPr>
-            <p:ph type="sldImg"/>
-          </p:nvPr>
-        </p:nvSpPr>
-        <p:spPr/>
-      </p:sp>
-      <p:sp>
-        <p:nvSpPr>
-          <p:cNvPr id="3" name="Notes Placeholder 2"/>
-          <p:cNvSpPr>
-            <a:spLocks noGrp="1"/>
-          </p:cNvSpPr>
-          <p:nvPr>
-            <p:ph type="body" idx="1"/>
-          </p:nvPr>
-        </p:nvSpPr>
-        <p:spPr/>
-        <p:txBody>
-          <a:bodyPr/>
-          <a:lstStyle/>
-          <a:p>
-            <a:r>
-              <a:rPr lang="en-US" dirty="0"/>
-              <a:t/>
-            </a:r>
             <a:endParaRPr lang="en-US" dirty="0"/>
           </a:p>
         </p:txBody>
@@ -1130,10 +883,6 @@
           <a:bodyPr/>
           <a:lstStyle/>
           <a:p>
-            <a:r>
-              <a:rPr lang="en-US" dirty="0"/>
-              <a:t/>
-            </a:r>
             <a:endParaRPr lang="en-US" dirty="0"/>
           </a:p>
         </p:txBody>
@@ -1155,7 +904,7 @@
           <a:p>
             <a:fld id="{F7021451-1387-4CA6-816F-3879F97B5CBC}" type="slidenum">
               <a:rPr lang="en-US"/>
-              <a:t>2</a:t>
+              <a:t>3</a:t>
             </a:fld>
             <a:endParaRPr lang="en-US"/>
           </a:p>
@@ -1218,10 +967,6 @@
           <a:bodyPr/>
           <a:lstStyle/>
           <a:p>
-            <a:r>
-              <a:rPr lang="en-US" dirty="0"/>
-              <a:t/>
-            </a:r>
             <a:endParaRPr lang="en-US" dirty="0"/>
           </a:p>
         </p:txBody>
@@ -1243,7 +988,7 @@
           <a:p>
             <a:fld id="{F7021451-1387-4CA6-816F-3879F97B5CBC}" type="slidenum">
               <a:rPr lang="en-US"/>
-              <a:t>3</a:t>
+              <a:t>4</a:t>
             </a:fld>
             <a:endParaRPr lang="en-US"/>
           </a:p>
@@ -1306,10 +1051,6 @@
           <a:bodyPr/>
           <a:lstStyle/>
           <a:p>
-            <a:r>
-              <a:rPr lang="en-US" dirty="0"/>
-              <a:t/>
-            </a:r>
             <a:endParaRPr lang="en-US" dirty="0"/>
           </a:p>
         </p:txBody>
@@ -1331,7 +1072,7 @@
           <a:p>
             <a:fld id="{F7021451-1387-4CA6-816F-3879F97B5CBC}" type="slidenum">
               <a:rPr lang="en-US"/>
-              <a:t>4</a:t>
+              <a:t>5</a:t>
             </a:fld>
             <a:endParaRPr lang="en-US"/>
           </a:p>
@@ -1394,10 +1135,6 @@
           <a:bodyPr/>
           <a:lstStyle/>
           <a:p>
-            <a:r>
-              <a:rPr lang="en-US" dirty="0"/>
-              <a:t/>
-            </a:r>
             <a:endParaRPr lang="en-US" dirty="0"/>
           </a:p>
         </p:txBody>
@@ -1419,7 +1156,7 @@
           <a:p>
             <a:fld id="{F7021451-1387-4CA6-816F-3879F97B5CBC}" type="slidenum">
               <a:rPr lang="en-US"/>
-              <a:t>5</a:t>
+              <a:t>6</a:t>
             </a:fld>
             <a:endParaRPr lang="en-US"/>
           </a:p>
@@ -1482,10 +1219,6 @@
           <a:bodyPr/>
           <a:lstStyle/>
           <a:p>
-            <a:r>
-              <a:rPr lang="en-US" dirty="0"/>
-              <a:t/>
-            </a:r>
             <a:endParaRPr lang="en-US" dirty="0"/>
           </a:p>
         </p:txBody>
@@ -1507,7 +1240,7 @@
           <a:p>
             <a:fld id="{F7021451-1387-4CA6-816F-3879F97B5CBC}" type="slidenum">
               <a:rPr lang="en-US"/>
-              <a:t>6</a:t>
+              <a:t>7</a:t>
             </a:fld>
             <a:endParaRPr lang="en-US"/>
           </a:p>
@@ -1570,10 +1303,6 @@
           <a:bodyPr/>
           <a:lstStyle/>
           <a:p>
-            <a:r>
-              <a:rPr lang="en-US" dirty="0"/>
-              <a:t/>
-            </a:r>
             <a:endParaRPr lang="en-US" dirty="0"/>
           </a:p>
         </p:txBody>
@@ -1595,7 +1324,7 @@
           <a:p>
             <a:fld id="{F7021451-1387-4CA6-816F-3879F97B5CBC}" type="slidenum">
               <a:rPr lang="en-US"/>
-              <a:t>7</a:t>
+              <a:t>8</a:t>
             </a:fld>
             <a:endParaRPr lang="en-US"/>
           </a:p>
@@ -1658,10 +1387,6 @@
           <a:bodyPr/>
           <a:lstStyle/>
           <a:p>
-            <a:r>
-              <a:rPr lang="en-US" dirty="0"/>
-              <a:t/>
-            </a:r>
             <a:endParaRPr lang="en-US" dirty="0"/>
           </a:p>
         </p:txBody>
@@ -1683,7 +1408,7 @@
           <a:p>
             <a:fld id="{F7021451-1387-4CA6-816F-3879F97B5CBC}" type="slidenum">
               <a:rPr lang="en-US"/>
-              <a:t>8</a:t>
+              <a:t>9</a:t>
             </a:fld>
             <a:endParaRPr lang="en-US"/>
           </a:p>
@@ -1746,10 +1471,6 @@
           <a:bodyPr/>
           <a:lstStyle/>
           <a:p>
-            <a:r>
-              <a:rPr lang="en-US" dirty="0"/>
-              <a:t/>
-            </a:r>
             <a:endParaRPr lang="en-US" dirty="0"/>
           </a:p>
         </p:txBody>
@@ -1771,7 +1492,7 @@
           <a:p>
             <a:fld id="{F7021451-1387-4CA6-816F-3879F97B5CBC}" type="slidenum">
               <a:rPr lang="en-US"/>
-              <a:t>9</a:t>
+              <a:t>10</a:t>
             </a:fld>
             <a:endParaRPr lang="en-US"/>
           </a:p>
@@ -1820,9 +1541,351 @@
 </p:sldLayout>
 </file>
 
+<file path=ppt/slideLayouts/slideLayout2.xml><?xml version="1.0" encoding="utf-8"?>
+<p:sldLayout xmlns:a="http://schemas.openxmlformats.org/drawingml/2006/main" xmlns:r="http://schemas.openxmlformats.org/officeDocument/2006/relationships" xmlns:p="http://schemas.openxmlformats.org/presentationml/2006/main" userDrawn="1">
+  <p:cSld name="Diapositiva de título">
+    <p:spTree>
+      <p:nvGrpSpPr>
+        <p:cNvPr id="1" name=""/>
+        <p:cNvGrpSpPr/>
+        <p:nvPr/>
+      </p:nvGrpSpPr>
+      <p:grpSpPr>
+        <a:xfrm>
+          <a:off x="0" y="0"/>
+          <a:ext cx="0" cy="0"/>
+          <a:chOff x="0" y="0"/>
+          <a:chExt cx="0" cy="0"/>
+        </a:xfrm>
+      </p:grpSpPr>
+      <p:sp>
+        <p:nvSpPr>
+          <p:cNvPr id="7" name="Rectangle 4">
+            <a:extLst>
+              <a:ext uri="{FF2B5EF4-FFF2-40B4-BE49-F238E27FC236}">
+                <a16:creationId xmlns:a16="http://schemas.microsoft.com/office/drawing/2014/main" id="{07CAE521-C03A-799B-0D20-687F870E33A9}"/>
+              </a:ext>
+            </a:extLst>
+          </p:cNvPr>
+          <p:cNvSpPr/>
+          <p:nvPr userDrawn="1"/>
+        </p:nvSpPr>
+        <p:spPr>
+          <a:xfrm>
+            <a:off x="-7454" y="-33130"/>
+            <a:ext cx="9144000" cy="5176630"/>
+          </a:xfrm>
+          <a:prstGeom prst="rect">
+            <a:avLst/>
+          </a:prstGeom>
+          <a:solidFill>
+            <a:srgbClr val="00194C"/>
+          </a:solidFill>
+        </p:spPr>
+        <p:style>
+          <a:lnRef idx="2">
+            <a:schemeClr val="accent1">
+              <a:shade val="15000"/>
+            </a:schemeClr>
+          </a:lnRef>
+          <a:fillRef idx="1">
+            <a:schemeClr val="accent1"/>
+          </a:fillRef>
+          <a:effectRef idx="0">
+            <a:schemeClr val="accent1"/>
+          </a:effectRef>
+          <a:fontRef idx="minor">
+            <a:schemeClr val="lt1"/>
+          </a:fontRef>
+        </p:style>
+        <p:txBody>
+          <a:bodyPr rtlCol="0" anchor="ctr"/>
+          <a:lstStyle/>
+          <a:p>
+            <a:pPr algn="ctr"/>
+            <a:endParaRPr lang="en-US" sz="1350"/>
+          </a:p>
+        </p:txBody>
+      </p:sp>
+      <p:sp>
+        <p:nvSpPr>
+          <p:cNvPr id="2" name="Título 1">
+            <a:extLst>
+              <a:ext uri="{FF2B5EF4-FFF2-40B4-BE49-F238E27FC236}">
+                <a16:creationId xmlns:a16="http://schemas.microsoft.com/office/drawing/2014/main" id="{70EABD7A-2025-3203-1869-9B793A62697D}"/>
+              </a:ext>
+            </a:extLst>
+          </p:cNvPr>
+          <p:cNvSpPr>
+            <a:spLocks noGrp="1"/>
+          </p:cNvSpPr>
+          <p:nvPr>
+            <p:ph type="ctrTitle" hasCustomPrompt="1"/>
+          </p:nvPr>
+        </p:nvSpPr>
+        <p:spPr>
+          <a:xfrm>
+            <a:off x="1143000" y="1505521"/>
+            <a:ext cx="6858000" cy="1126951"/>
+          </a:xfrm>
+        </p:spPr>
+        <p:txBody>
+          <a:bodyPr anchor="b">
+            <a:normAutofit/>
+          </a:bodyPr>
+          <a:lstStyle>
+            <a:lvl1pPr algn="l">
+              <a:defRPr sz="4950">
+                <a:solidFill>
+                  <a:srgbClr val="0070C0"/>
+                </a:solidFill>
+              </a:defRPr>
+            </a:lvl1pPr>
+          </a:lstStyle>
+          <a:p>
+            <a:r>
+              <a:rPr lang="es-MX" sz="4500">
+                <a:solidFill>
+                  <a:srgbClr val="00B0F0"/>
+                </a:solidFill>
+                <a:latin typeface="Teko"/>
+              </a:rPr>
+              <a:t>TEMPLATES POLI</a:t>
+            </a:r>
+            <a:endParaRPr lang="es-CO" sz="4500">
+              <a:solidFill>
+                <a:srgbClr val="00B0F0"/>
+              </a:solidFill>
+              <a:latin typeface="Teko"/>
+            </a:endParaRPr>
+          </a:p>
+        </p:txBody>
+      </p:sp>
+      <p:sp>
+        <p:nvSpPr>
+          <p:cNvPr id="14" name="Título 1">
+            <a:extLst>
+              <a:ext uri="{FF2B5EF4-FFF2-40B4-BE49-F238E27FC236}">
+                <a16:creationId xmlns:a16="http://schemas.microsoft.com/office/drawing/2014/main" id="{E30AC1CD-20B6-4439-7DD6-0A8954983F83}"/>
+              </a:ext>
+            </a:extLst>
+          </p:cNvPr>
+          <p:cNvSpPr txBox="1">
+            <a:spLocks/>
+          </p:cNvSpPr>
+          <p:nvPr userDrawn="1"/>
+        </p:nvSpPr>
+        <p:spPr>
+          <a:xfrm>
+            <a:off x="1135546" y="2197560"/>
+            <a:ext cx="6858000" cy="1126951"/>
+          </a:xfrm>
+          <a:prstGeom prst="rect">
+            <a:avLst/>
+          </a:prstGeom>
+        </p:spPr>
+        <p:txBody>
+          <a:bodyPr vert="horz" lIns="68580" tIns="34290" rIns="68580" bIns="34290" rtlCol="0" anchor="b">
+            <a:normAutofit/>
+          </a:bodyPr>
+          <a:lstStyle>
+            <a:lvl1pPr algn="l" defTabSz="914400" rtl="0" eaLnBrk="1" latinLnBrk="0" hangingPunct="1">
+              <a:lnSpc>
+                <a:spcPct val="90000"/>
+              </a:lnSpc>
+              <a:spcBef>
+                <a:spcPct val="0"/>
+              </a:spcBef>
+              <a:buNone/>
+              <a:defRPr sz="6600" kern="1200">
+                <a:solidFill>
+                  <a:schemeClr val="tx1"/>
+                </a:solidFill>
+                <a:latin typeface="+mj-lt"/>
+                <a:ea typeface="+mj-ea"/>
+                <a:cs typeface="+mj-cs"/>
+              </a:defRPr>
+            </a:lvl1pPr>
+          </a:lstStyle>
+          <a:p>
+            <a:pPr marL="0" marR="0" lvl="0" indent="0" algn="l" defTabSz="685800" rtl="0" eaLnBrk="1" fontAlgn="auto" latinLnBrk="0" hangingPunct="1">
+              <a:lnSpc>
+                <a:spcPct val="100000"/>
+              </a:lnSpc>
+              <a:spcBef>
+                <a:spcPts val="0"/>
+              </a:spcBef>
+              <a:spcAft>
+                <a:spcPts val="0"/>
+              </a:spcAft>
+              <a:buClrTx/>
+              <a:buSzTx/>
+              <a:buFontTx/>
+              <a:buNone/>
+              <a:tabLst/>
+              <a:defRPr/>
+            </a:pPr>
+            <a:endParaRPr lang="es-CO" sz="3300">
+              <a:solidFill>
+                <a:schemeClr val="bg1"/>
+              </a:solidFill>
+              <a:latin typeface="Teko"/>
+            </a:endParaRPr>
+          </a:p>
+        </p:txBody>
+      </p:sp>
+      <p:pic>
+        <p:nvPicPr>
+          <p:cNvPr id="15" name="Imagen" descr="Imagen">
+            <a:extLst>
+              <a:ext uri="{FF2B5EF4-FFF2-40B4-BE49-F238E27FC236}">
+                <a16:creationId xmlns:a16="http://schemas.microsoft.com/office/drawing/2014/main" id="{7B42AF48-45D8-AABD-DDAF-0F560529777F}"/>
+              </a:ext>
+            </a:extLst>
+          </p:cNvPr>
+          <p:cNvPicPr>
+            <a:picLocks noChangeAspect="1"/>
+          </p:cNvPicPr>
+          <p:nvPr userDrawn="1"/>
+        </p:nvPicPr>
+        <p:blipFill>
+          <a:blip r:embed="rId2"/>
+          <a:stretch>
+            <a:fillRect/>
+          </a:stretch>
+        </p:blipFill>
+        <p:spPr>
+          <a:xfrm>
+            <a:off x="491376" y="310661"/>
+            <a:ext cx="1618738" cy="916127"/>
+          </a:xfrm>
+          <a:prstGeom prst="rect">
+            <a:avLst/>
+          </a:prstGeom>
+          <a:ln w="12700">
+            <a:miter lim="400000"/>
+          </a:ln>
+        </p:spPr>
+      </p:pic>
+      <p:pic>
+        <p:nvPicPr>
+          <p:cNvPr id="16" name="Imagen" descr="Imagen">
+            <a:extLst>
+              <a:ext uri="{FF2B5EF4-FFF2-40B4-BE49-F238E27FC236}">
+                <a16:creationId xmlns:a16="http://schemas.microsoft.com/office/drawing/2014/main" id="{406B248A-BCAC-B76E-6492-081AB4BB0096}"/>
+              </a:ext>
+            </a:extLst>
+          </p:cNvPr>
+          <p:cNvPicPr>
+            <a:picLocks noChangeAspect="1"/>
+          </p:cNvPicPr>
+          <p:nvPr userDrawn="1"/>
+        </p:nvPicPr>
+        <p:blipFill>
+          <a:blip r:embed="rId3"/>
+          <a:stretch>
+            <a:fillRect/>
+          </a:stretch>
+        </p:blipFill>
+        <p:spPr>
+          <a:xfrm rot="16200000">
+            <a:off x="6258042" y="2256246"/>
+            <a:ext cx="1357052" cy="4414865"/>
+          </a:xfrm>
+          <a:prstGeom prst="rect">
+            <a:avLst/>
+          </a:prstGeom>
+          <a:ln w="12700">
+            <a:miter lim="400000"/>
+          </a:ln>
+        </p:spPr>
+      </p:pic>
+      <p:sp>
+        <p:nvSpPr>
+          <p:cNvPr id="22" name="Título 1">
+            <a:extLst>
+              <a:ext uri="{FF2B5EF4-FFF2-40B4-BE49-F238E27FC236}">
+                <a16:creationId xmlns:a16="http://schemas.microsoft.com/office/drawing/2014/main" id="{4E6FBE92-44BA-3E23-59B6-9026913E80EC}"/>
+              </a:ext>
+            </a:extLst>
+          </p:cNvPr>
+          <p:cNvSpPr txBox="1">
+            <a:spLocks/>
+          </p:cNvSpPr>
+          <p:nvPr userDrawn="1"/>
+        </p:nvSpPr>
+        <p:spPr>
+          <a:xfrm>
+            <a:off x="1143000" y="2613930"/>
+            <a:ext cx="4164496" cy="474152"/>
+          </a:xfrm>
+          <a:prstGeom prst="rect">
+            <a:avLst/>
+          </a:prstGeom>
+        </p:spPr>
+        <p:txBody>
+          <a:bodyPr vert="horz" lIns="68580" tIns="34290" rIns="68580" bIns="34290" rtlCol="0" anchor="b">
+            <a:normAutofit fontScale="92500" lnSpcReduction="10000"/>
+          </a:bodyPr>
+          <a:lstStyle>
+            <a:lvl1pPr algn="l" defTabSz="914400" rtl="0" eaLnBrk="1" latinLnBrk="0" hangingPunct="1">
+              <a:lnSpc>
+                <a:spcPct val="90000"/>
+              </a:lnSpc>
+              <a:spcBef>
+                <a:spcPct val="0"/>
+              </a:spcBef>
+              <a:buNone/>
+              <a:defRPr sz="6600" kern="1200">
+                <a:solidFill>
+                  <a:schemeClr val="tx1"/>
+                </a:solidFill>
+                <a:latin typeface="+mj-lt"/>
+                <a:ea typeface="+mj-ea"/>
+                <a:cs typeface="+mj-cs"/>
+              </a:defRPr>
+            </a:lvl1pPr>
+          </a:lstStyle>
+          <a:p>
+            <a:r>
+              <a:rPr lang="es-MX" sz="3300">
+                <a:solidFill>
+                  <a:schemeClr val="bg1"/>
+                </a:solidFill>
+                <a:latin typeface="Teko"/>
+              </a:rPr>
+              <a:t>CAMPAÑA 2024</a:t>
+            </a:r>
+            <a:endParaRPr lang="es-CO" sz="3300">
+              <a:solidFill>
+                <a:schemeClr val="bg1"/>
+              </a:solidFill>
+              <a:latin typeface="Teko"/>
+            </a:endParaRPr>
+          </a:p>
+        </p:txBody>
+      </p:sp>
+    </p:spTree>
+    <p:extLst>
+      <p:ext uri="{BB962C8B-B14F-4D97-AF65-F5344CB8AC3E}">
+        <p14:creationId xmlns:p14="http://schemas.microsoft.com/office/powerpoint/2010/main" val="3891030393"/>
+      </p:ext>
+    </p:extLst>
+  </p:cSld>
+  <p:clrMapOvr>
+    <a:masterClrMapping/>
+  </p:clrMapOvr>
+</p:sldLayout>
+</file>
+
 <file path=ppt/slideMasters/slideMaster1.xml><?xml version="1.0" encoding="utf-8"?>
 <p:sldMaster xmlns:a="http://schemas.openxmlformats.org/drawingml/2006/main" xmlns:r="http://schemas.openxmlformats.org/officeDocument/2006/relationships" xmlns:p="http://schemas.openxmlformats.org/presentationml/2006/main">
   <p:cSld>
+    <p:bg>
+      <p:bgRef idx="1001">
+        <a:schemeClr val="bg1"/>
+      </p:bgRef>
+    </p:bg>
     <p:spTree>
       <p:nvGrpSpPr>
         <p:cNvPr id="1" name=""/>
@@ -1842,6 +1905,7 @@
   <p:clrMap bg1="lt1" tx1="dk1" bg2="lt2" tx2="dk2" accent1="accent1" accent2="accent2" accent3="accent3" accent4="accent4" accent5="accent5" accent6="accent6" hlink="hlink" folHlink="folHlink"/>
   <p:sldLayoutIdLst>
     <p:sldLayoutId id="2147483649" r:id="rId1"/>
+    <p:sldLayoutId id="2147483650" r:id="rId2"/>
   </p:sldLayoutIdLst>
   <p:hf sldNum="0" hdr="0" ftr="0" dt="0"/>
   <p:txStyles>
@@ -2099,12 +2163,151 @@
 
 <file path=ppt/slides/slide1.xml><?xml version="1.0" encoding="utf-8"?>
 <p:sld xmlns:a="http://schemas.openxmlformats.org/drawingml/2006/main" xmlns:r="http://schemas.openxmlformats.org/officeDocument/2006/relationships" xmlns:p="http://schemas.openxmlformats.org/presentationml/2006/main">
-  <p:cSld name="Slide 1">
+  <p:cSld>
+    <p:spTree>
+      <p:nvGrpSpPr>
+        <p:cNvPr id="1" name=""/>
+        <p:cNvGrpSpPr/>
+        <p:nvPr/>
+      </p:nvGrpSpPr>
+      <p:grpSpPr>
+        <a:xfrm>
+          <a:off x="0" y="0"/>
+          <a:ext cx="0" cy="0"/>
+          <a:chOff x="0" y="0"/>
+          <a:chExt cx="0" cy="0"/>
+        </a:xfrm>
+      </p:grpSpPr>
+      <p:sp>
+        <p:nvSpPr>
+          <p:cNvPr id="4" name="Rectángulo: esquinas superiores, una redondeada y la otra cortada 3">
+            <a:extLst>
+              <a:ext uri="{FF2B5EF4-FFF2-40B4-BE49-F238E27FC236}">
+                <a16:creationId xmlns:a16="http://schemas.microsoft.com/office/drawing/2014/main" id="{55C6C1DE-B6C1-999A-B801-56C24ACE1C8E}"/>
+              </a:ext>
+            </a:extLst>
+          </p:cNvPr>
+          <p:cNvSpPr/>
+          <p:nvPr/>
+        </p:nvSpPr>
+        <p:spPr>
+          <a:xfrm>
+            <a:off x="1100710" y="2430585"/>
+            <a:ext cx="3221197" cy="1067859"/>
+          </a:xfrm>
+          <a:prstGeom prst="snipRoundRect">
+            <a:avLst/>
+          </a:prstGeom>
+          <a:solidFill>
+            <a:srgbClr val="00194C"/>
+          </a:solidFill>
+          <a:ln>
+            <a:noFill/>
+          </a:ln>
+        </p:spPr>
+        <p:style>
+          <a:lnRef idx="2">
+            <a:schemeClr val="accent1">
+              <a:shade val="15000"/>
+            </a:schemeClr>
+          </a:lnRef>
+          <a:fillRef idx="1">
+            <a:schemeClr val="accent1"/>
+          </a:fillRef>
+          <a:effectRef idx="0">
+            <a:schemeClr val="accent1"/>
+          </a:effectRef>
+          <a:fontRef idx="minor">
+            <a:schemeClr val="lt1"/>
+          </a:fontRef>
+        </p:style>
+        <p:txBody>
+          <a:bodyPr rtlCol="0" anchor="ctr"/>
+          <a:lstStyle/>
+          <a:p>
+            <a:pPr algn="ctr"/>
+            <a:endParaRPr lang="es-419" sz="1350"/>
+          </a:p>
+        </p:txBody>
+      </p:sp>
+      <p:sp>
+        <p:nvSpPr>
+          <p:cNvPr id="5" name="Título 4">
+            <a:extLst>
+              <a:ext uri="{FF2B5EF4-FFF2-40B4-BE49-F238E27FC236}">
+                <a16:creationId xmlns:a16="http://schemas.microsoft.com/office/drawing/2014/main" id="{AB39384A-FEA1-79C6-F020-6520EBFB3592}"/>
+              </a:ext>
+            </a:extLst>
+          </p:cNvPr>
+          <p:cNvSpPr>
+            <a:spLocks noGrp="1"/>
+          </p:cNvSpPr>
+          <p:nvPr>
+            <p:ph type="ctrTitle"/>
+          </p:nvPr>
+        </p:nvSpPr>
+        <p:spPr>
+          <a:xfrm>
+            <a:off x="525583" y="1842918"/>
+            <a:ext cx="8274539" cy="1126951"/>
+          </a:xfrm>
+        </p:spPr>
+        <p:txBody>
+          <a:bodyPr>
+            <a:normAutofit fontScale="90000"/>
+          </a:bodyPr>
+          <a:lstStyle/>
+          <a:p>
+            <a:pPr algn="ctr"/>
+            <a:r>
+              <a:rPr lang="es-419" dirty="0"/>
+              <a:t>Modelos de Pronostico</a:t>
+            </a:r>
+            <a:br>
+              <a:rPr lang="es-419" dirty="0"/>
+            </a:br>
+            <a:r>
+              <a:rPr lang="es-419" sz="4000" b="1" dirty="0">
+                <a:solidFill>
+                  <a:srgbClr val="FFFFFF"/>
+                </a:solidFill>
+                <a:latin typeface="Arial" pitchFamily="34" charset="0"/>
+                <a:cs typeface="Arial" pitchFamily="34" charset="-120"/>
+              </a:rPr>
+              <a:t>Indicadores Estratégicos 2026-2030</a:t>
+            </a:r>
+            <a:endParaRPr lang="es-419" sz="5300" b="1" dirty="0">
+              <a:solidFill>
+                <a:srgbClr val="FFFFFF"/>
+              </a:solidFill>
+              <a:latin typeface="Arial" pitchFamily="34" charset="0"/>
+              <a:cs typeface="Arial" pitchFamily="34" charset="-120"/>
+            </a:endParaRPr>
+          </a:p>
+        </p:txBody>
+      </p:sp>
+    </p:spTree>
+    <p:extLst>
+      <p:ext uri="{BB962C8B-B14F-4D97-AF65-F5344CB8AC3E}">
+        <p14:creationId xmlns:p14="http://schemas.microsoft.com/office/powerpoint/2010/main" val="1397344631"/>
+      </p:ext>
+    </p:extLst>
+  </p:cSld>
+  <p:clrMapOvr>
+    <a:masterClrMapping/>
+  </p:clrMapOvr>
+</p:sld>
+</file>
+
+<file path=ppt/slides/slide10.xml><?xml version="1.0" encoding="utf-8"?>
+<p:sld xmlns:a="http://schemas.openxmlformats.org/drawingml/2006/main" xmlns:r="http://schemas.openxmlformats.org/officeDocument/2006/relationships" xmlns:p="http://schemas.openxmlformats.org/presentationml/2006/main">
+  <p:cSld name="Slide 10">
     <p:bg>
       <p:bgPr>
         <a:solidFill>
-          <a:srgbClr val="1C2833"/>
+          <a:srgbClr val="FFFFFF"/>
         </a:solidFill>
+        <a:effectLst/>
       </p:bgPr>
     </p:bg>
     <p:spTree>
@@ -2129,8 +2332,8 @@
         </p:nvSpPr>
         <p:spPr>
           <a:xfrm>
-            <a:off x="914400" y="1371600"/>
-            <a:ext cx="7315200" cy="1097280"/>
+            <a:off x="457200" y="457200"/>
+            <a:ext cx="8229600" cy="640080"/>
           </a:xfrm>
           <a:prstGeom prst="rect">
             <a:avLst/>
@@ -2142,51 +2345,63 @@
           <a:bodyPr wrap="square" rtlCol="0" anchor="ctr"/>
           <a:lstStyle/>
           <a:p>
-            <a:pPr algn="ctr" indent="0" marL="0">
-              <a:buNone/>
-            </a:pPr>
-            <a:r>
-              <a:rPr lang="en-US" sz="4800" b="1" dirty="0">
-                <a:solidFill>
-                  <a:srgbClr val="FFFFFF"/>
-                </a:solidFill>
-                <a:latin typeface="Arial" pitchFamily="34" charset="0"/>
-                <a:ea typeface="Arial" pitchFamily="34" charset="-122"/>
-                <a:cs typeface="Arial" pitchFamily="34" charset="-120"/>
-              </a:rPr>
-              <a:t>Modelos de Pronóstico</a:t>
-            </a:r>
-            <a:endParaRPr lang="en-US" sz="4800" dirty="0"/>
-          </a:p>
-          <a:p>
-            <a:pPr algn="ctr" indent="0" marL="0">
-              <a:buNone/>
-            </a:pPr>
-            <a:r>
-              <a:rPr lang="en-US" sz="4800" b="1" dirty="0">
-                <a:solidFill>
-                  <a:srgbClr val="FFFFFF"/>
-                </a:solidFill>
-                <a:latin typeface="Arial" pitchFamily="34" charset="0"/>
-                <a:ea typeface="Arial" pitchFamily="34" charset="-122"/>
-                <a:cs typeface="Arial" pitchFamily="34" charset="-120"/>
-              </a:rPr>
-              <a:t>Multivariable</a:t>
-            </a:r>
-            <a:endParaRPr lang="en-US" sz="4800" dirty="0"/>
-          </a:p>
-        </p:txBody>
-      </p:sp>
-      <p:sp>
-        <p:nvSpPr>
-          <p:cNvPr id="3" name="Text 1"/>
-          <p:cNvSpPr/>
-          <p:nvPr/>
-        </p:nvSpPr>
-        <p:spPr>
-          <a:xfrm>
-            <a:off x="3200400" y="731520"/>
-            <a:ext cx="2743200" cy="457200"/>
+            <a:pPr marL="0" indent="0">
+              <a:buNone/>
+            </a:pPr>
+            <a:r>
+              <a:rPr lang="en-US" sz="4000" b="1" dirty="0">
+                <a:solidFill>
+                  <a:srgbClr val="1C2833"/>
+                </a:solidFill>
+              </a:rPr>
+              <a:t>Proyección CAGR Suavizado</a:t>
+            </a:r>
+            <a:endParaRPr lang="en-US" sz="4000" dirty="0"/>
+          </a:p>
+        </p:txBody>
+      </p:sp>
+      <p:sp>
+        <p:nvSpPr>
+          <p:cNvPr id="3" name="Shape 1"/>
+          <p:cNvSpPr/>
+          <p:nvPr/>
+        </p:nvSpPr>
+        <p:spPr>
+          <a:xfrm>
+            <a:off x="731520" y="1188720"/>
+            <a:ext cx="7680960" cy="3383280"/>
+          </a:xfrm>
+          <a:prstGeom prst="rect">
+            <a:avLst/>
+          </a:prstGeom>
+          <a:solidFill>
+            <a:srgbClr val="F8F9FA"/>
+          </a:solidFill>
+          <a:ln w="12700">
+            <a:solidFill>
+              <a:srgbClr val="333333"/>
+            </a:solidFill>
+            <a:prstDash val="solid"/>
+          </a:ln>
+        </p:spPr>
+        <p:txBody>
+          <a:bodyPr/>
+          <a:lstStyle/>
+          <a:p>
+            <a:endParaRPr lang="es-419"/>
+          </a:p>
+        </p:txBody>
+      </p:sp>
+      <p:sp>
+        <p:nvSpPr>
+          <p:cNvPr id="4" name="Text 2"/>
+          <p:cNvSpPr/>
+          <p:nvPr/>
+        </p:nvSpPr>
+        <p:spPr>
+          <a:xfrm>
+            <a:off x="914400" y="1371600"/>
+            <a:ext cx="7315200" cy="274320"/>
           </a:xfrm>
           <a:prstGeom prst="rect">
             <a:avLst/>
@@ -2198,30 +2413,30 @@
           <a:bodyPr wrap="square" rtlCol="0" anchor="ctr"/>
           <a:lstStyle/>
           <a:p>
-            <a:pPr algn="ctr" indent="0" marL="0">
-              <a:buNone/>
-            </a:pPr>
-            <a:r>
-              <a:rPr lang="en-US" sz="1800" b="1" dirty="0">
-                <a:solidFill>
-                  <a:srgbClr val="F39C12"/>
-                </a:solidFill>
-              </a:rPr>
-              <a:t>v7.1 Definitivo</a:t>
-            </a:r>
-            <a:endParaRPr lang="en-US" sz="1800" dirty="0"/>
-          </a:p>
-        </p:txBody>
-      </p:sp>
-      <p:sp>
-        <p:nvSpPr>
-          <p:cNvPr id="4" name="Text 2"/>
-          <p:cNvSpPr/>
-          <p:nvPr/>
-        </p:nvSpPr>
-        <p:spPr>
-          <a:xfrm>
-            <a:off x="914400" y="2743200"/>
+            <a:pPr marL="0" indent="0">
+              <a:buNone/>
+            </a:pPr>
+            <a:r>
+              <a:rPr lang="en-US" sz="2000" b="1" dirty="0">
+                <a:solidFill>
+                  <a:srgbClr val="27AE60"/>
+                </a:solidFill>
+              </a:rPr>
+              <a:t>Definición</a:t>
+            </a:r>
+            <a:endParaRPr lang="en-US" sz="2000" dirty="0"/>
+          </a:p>
+        </p:txBody>
+      </p:sp>
+      <p:sp>
+        <p:nvSpPr>
+          <p:cNvPr id="5" name="Text 3"/>
+          <p:cNvSpPr/>
+          <p:nvPr/>
+        </p:nvSpPr>
+        <p:spPr>
+          <a:xfrm>
+            <a:off x="914400" y="1737360"/>
             <a:ext cx="7315200" cy="548640"/>
           </a:xfrm>
           <a:prstGeom prst="rect">
@@ -2234,31 +2449,31 @@
           <a:bodyPr wrap="square" rtlCol="0" anchor="ctr"/>
           <a:lstStyle/>
           <a:p>
-            <a:pPr algn="ctr" indent="0" marL="0">
-              <a:buNone/>
-            </a:pPr>
-            <a:r>
-              <a:rPr lang="en-US" sz="2400" dirty="0">
-                <a:solidFill>
-                  <a:srgbClr val="ECF0F1"/>
-                </a:solidFill>
-              </a:rPr>
-              <a:t>Tipos, Definiciones y Parámetros Principales</a:t>
-            </a:r>
-            <a:endParaRPr lang="en-US" sz="2400" dirty="0"/>
-          </a:p>
-        </p:txBody>
-      </p:sp>
-      <p:sp>
-        <p:nvSpPr>
-          <p:cNvPr id="5" name="Text 3"/>
-          <p:cNvSpPr/>
-          <p:nvPr/>
-        </p:nvSpPr>
-        <p:spPr>
-          <a:xfrm>
-            <a:off x="914400" y="3383280"/>
-            <a:ext cx="7315200" cy="365760"/>
+            <a:pPr marL="0" indent="0">
+              <a:buNone/>
+            </a:pPr>
+            <a:r>
+              <a:rPr lang="en-US" sz="1600" dirty="0">
+                <a:solidFill>
+                  <a:srgbClr val="5D6D7E"/>
+                </a:solidFill>
+              </a:rPr>
+              <a:t>Tasa de Crecimiento Anual Compuesta suavizada. Combina CAGR histórico (60%) y reciente (40%).</a:t>
+            </a:r>
+            <a:endParaRPr lang="en-US" sz="1600" dirty="0"/>
+          </a:p>
+        </p:txBody>
+      </p:sp>
+      <p:sp>
+        <p:nvSpPr>
+          <p:cNvPr id="6" name="Text 4"/>
+          <p:cNvSpPr/>
+          <p:nvPr/>
+        </p:nvSpPr>
+        <p:spPr>
+          <a:xfrm>
+            <a:off x="914400" y="2377440"/>
+            <a:ext cx="7315200" cy="274320"/>
           </a:xfrm>
           <a:prstGeom prst="rect">
             <a:avLst/>
@@ -2270,31 +2485,31 @@
           <a:bodyPr wrap="square" rtlCol="0" anchor="ctr"/>
           <a:lstStyle/>
           <a:p>
-            <a:pPr algn="ctr" indent="0" marL="0">
-              <a:buNone/>
-            </a:pPr>
-            <a:r>
-              <a:rPr lang="en-US" sz="1600" i="1" dirty="0">
-                <a:solidFill>
-                  <a:srgbClr val="95A5A6"/>
-                </a:solidFill>
-              </a:rPr>
-              <a:t>Análisis de 9 modelos estadísticos y Machine Learning</a:t>
-            </a:r>
-            <a:endParaRPr lang="en-US" sz="1600" dirty="0"/>
-          </a:p>
-        </p:txBody>
-      </p:sp>
-      <p:sp>
-        <p:nvSpPr>
-          <p:cNvPr id="6" name="Text 4"/>
-          <p:cNvSpPr/>
-          <p:nvPr/>
-        </p:nvSpPr>
-        <p:spPr>
-          <a:xfrm>
-            <a:off x="914400" y="4114800"/>
-            <a:ext cx="7315200" cy="274320"/>
+            <a:pPr marL="0" indent="0">
+              <a:buNone/>
+            </a:pPr>
+            <a:r>
+              <a:rPr lang="en-US" sz="2000" b="1" dirty="0">
+                <a:solidFill>
+                  <a:srgbClr val="27AE60"/>
+                </a:solidFill>
+              </a:rPr>
+              <a:t>Uso Principal</a:t>
+            </a:r>
+            <a:endParaRPr lang="en-US" sz="2000" dirty="0"/>
+          </a:p>
+        </p:txBody>
+      </p:sp>
+      <p:sp>
+        <p:nvSpPr>
+          <p:cNvPr id="7" name="Text 5"/>
+          <p:cNvSpPr/>
+          <p:nvPr/>
+        </p:nvSpPr>
+        <p:spPr>
+          <a:xfrm>
+            <a:off x="914400" y="2743200"/>
+            <a:ext cx="7315200" cy="457200"/>
           </a:xfrm>
           <a:prstGeom prst="rect">
             <a:avLst/>
@@ -2306,16 +2521,142 @@
           <a:bodyPr wrap="square" rtlCol="0" anchor="ctr"/>
           <a:lstStyle/>
           <a:p>
-            <a:pPr algn="ctr" indent="0" marL="0">
+            <a:pPr marL="0" indent="0">
+              <a:buNone/>
+            </a:pPr>
+            <a:r>
+              <a:rPr lang="en-US" sz="1600" dirty="0">
+                <a:solidFill>
+                  <a:srgbClr val="5D6D7E"/>
+                </a:solidFill>
+              </a:rPr>
+              <a:t>Proyecciones conservadoras. Estabiliza volatilidad. Respeta el Sentido del indicador.</a:t>
+            </a:r>
+            <a:endParaRPr lang="en-US" sz="1600" dirty="0"/>
+          </a:p>
+        </p:txBody>
+      </p:sp>
+      <p:sp>
+        <p:nvSpPr>
+          <p:cNvPr id="8" name="Text 6"/>
+          <p:cNvSpPr/>
+          <p:nvPr/>
+        </p:nvSpPr>
+        <p:spPr>
+          <a:xfrm>
+            <a:off x="914400" y="3291840"/>
+            <a:ext cx="7315200" cy="274320"/>
+          </a:xfrm>
+          <a:prstGeom prst="rect">
+            <a:avLst/>
+          </a:prstGeom>
+          <a:noFill/>
+          <a:ln/>
+        </p:spPr>
+        <p:txBody>
+          <a:bodyPr wrap="square" rtlCol="0" anchor="ctr"/>
+          <a:lstStyle/>
+          <a:p>
+            <a:pPr marL="0" indent="0">
+              <a:buNone/>
+            </a:pPr>
+            <a:r>
+              <a:rPr lang="en-US" sz="2000" b="1" dirty="0">
+                <a:solidFill>
+                  <a:srgbClr val="27AE60"/>
+                </a:solidFill>
+              </a:rPr>
+              <a:t>Parámetros Clave</a:t>
+            </a:r>
+            <a:endParaRPr lang="en-US" sz="2000" dirty="0"/>
+          </a:p>
+        </p:txBody>
+      </p:sp>
+      <p:sp>
+        <p:nvSpPr>
+          <p:cNvPr id="9" name="Text 7"/>
+          <p:cNvSpPr/>
+          <p:nvPr/>
+        </p:nvSpPr>
+        <p:spPr>
+          <a:xfrm>
+            <a:off x="1097280" y="3657600"/>
+            <a:ext cx="6858000" cy="822960"/>
+          </a:xfrm>
+          <a:prstGeom prst="rect">
+            <a:avLst/>
+          </a:prstGeom>
+          <a:noFill/>
+          <a:ln/>
+        </p:spPr>
+        <p:txBody>
+          <a:bodyPr wrap="square" rtlCol="0" anchor="ctr"/>
+          <a:lstStyle/>
+          <a:p>
+            <a:pPr marL="0" indent="0">
               <a:buNone/>
             </a:pPr>
             <a:r>
               <a:rPr lang="en-US" sz="1400" dirty="0">
                 <a:solidFill>
-                  <a:srgbClr val="95A5A6"/>
-                </a:solidFill>
-              </a:rPr>
-              <a:t>Noviembre 2025</a:t>
+                  <a:srgbClr val="5D6D7E"/>
+                </a:solidFill>
+                <a:latin typeface="Courier New" pitchFamily="34" charset="0"/>
+                <a:ea typeface="Courier New" pitchFamily="34" charset="-122"/>
+                <a:cs typeface="Courier New" pitchFamily="34" charset="-120"/>
+              </a:rPr>
+              <a:t>• baseline_growth: tasa suavizada</a:t>
+            </a:r>
+            <a:endParaRPr lang="en-US" sz="1400" dirty="0"/>
+          </a:p>
+          <a:p>
+            <a:pPr marL="0" indent="0">
+              <a:buNone/>
+            </a:pPr>
+            <a:r>
+              <a:rPr lang="en-US" sz="1400" dirty="0">
+                <a:solidFill>
+                  <a:srgbClr val="5D6D7E"/>
+                </a:solidFill>
+                <a:latin typeface="Courier New" pitchFamily="34" charset="0"/>
+                <a:ea typeface="Courier New" pitchFamily="34" charset="-122"/>
+                <a:cs typeface="Courier New" pitchFamily="34" charset="-120"/>
+              </a:rPr>
+              <a:t>• CAGR_total: crecimiento histórico</a:t>
+            </a:r>
+            <a:endParaRPr lang="en-US" sz="1400" dirty="0"/>
+          </a:p>
+          <a:p>
+            <a:pPr marL="0" indent="0">
+              <a:buNone/>
+            </a:pPr>
+            <a:r>
+              <a:rPr lang="en-US" sz="1400" dirty="0">
+                <a:solidFill>
+                  <a:srgbClr val="5D6D7E"/>
+                </a:solidFill>
+                <a:latin typeface="Courier New" pitchFamily="34" charset="0"/>
+                <a:ea typeface="Courier New" pitchFamily="34" charset="-122"/>
+                <a:cs typeface="Courier New" pitchFamily="34" charset="-120"/>
+              </a:rPr>
+              <a:t>• CAGR_recent: últimos 3 periodos</a:t>
+            </a:r>
+            <a:endParaRPr lang="en-US" sz="1400" dirty="0"/>
+          </a:p>
+          <a:p>
+            <a:pPr marL="0" indent="0">
+              <a:buNone/>
+            </a:pPr>
+            <a:r>
+              <a:rPr lang="en-US" sz="1400" dirty="0">
+                <a:solidFill>
+                  <a:srgbClr val="5D6D7E"/>
+                </a:solidFill>
+                <a:latin typeface="Courier New" pitchFamily="34" charset="0"/>
+                <a:ea typeface="Courier New" pitchFamily="34" charset="-122"/>
+                <a:cs typeface="Courier New" pitchFamily="34" charset="-120"/>
+              </a:rPr>
+              <a:t>• Validación por Sentido (Pos/Neg)</a:t>
             </a:r>
             <a:endParaRPr lang="en-US" sz="1400" dirty="0"/>
           </a:p>
@@ -2329,14 +2670,15 @@
 </p:sld>
 </file>
 
-<file path=ppt/slides/slide10.xml><?xml version="1.0" encoding="utf-8"?>
+<file path=ppt/slides/slide11.xml><?xml version="1.0" encoding="utf-8"?>
 <p:sld xmlns:a="http://schemas.openxmlformats.org/drawingml/2006/main" xmlns:r="http://schemas.openxmlformats.org/officeDocument/2006/relationships" xmlns:p="http://schemas.openxmlformats.org/presentationml/2006/main">
-  <p:cSld name="Slide 10">
+  <p:cSld name="Slide 11">
     <p:bg>
       <p:bgPr>
         <a:solidFill>
           <a:srgbClr val="FFFFFF"/>
         </a:solidFill>
+        <a:effectLst/>
       </p:bgPr>
     </p:bg>
     <p:spTree>
@@ -2374,7 +2716,7 @@
           <a:bodyPr wrap="square" rtlCol="0" anchor="ctr"/>
           <a:lstStyle/>
           <a:p>
-            <a:pPr indent="0" marL="0">
+            <a:pPr marL="0" indent="0">
               <a:buNone/>
             </a:pPr>
             <a:r>
@@ -2383,7 +2725,7 @@
                   <a:srgbClr val="1C2833"/>
                 </a:solidFill>
               </a:rPr>
-              <a:t>Proyección CAGR Suavizado</a:t>
+              <a:t>Media Móvil con Tendencia</a:t>
             </a:r>
             <a:endParaRPr lang="en-US" sz="4000" dirty="0"/>
           </a:p>
@@ -2413,6 +2755,13 @@
             <a:prstDash val="solid"/>
           </a:ln>
         </p:spPr>
+        <p:txBody>
+          <a:bodyPr/>
+          <a:lstStyle/>
+          <a:p>
+            <a:endParaRPr lang="es-419"/>
+          </a:p>
+        </p:txBody>
       </p:sp>
       <p:sp>
         <p:nvSpPr>
@@ -2435,7 +2784,7 @@
           <a:bodyPr wrap="square" rtlCol="0" anchor="ctr"/>
           <a:lstStyle/>
           <a:p>
-            <a:pPr indent="0" marL="0">
+            <a:pPr marL="0" indent="0">
               <a:buNone/>
             </a:pPr>
             <a:r>
@@ -2471,7 +2820,7 @@
           <a:bodyPr wrap="square" rtlCol="0" anchor="ctr"/>
           <a:lstStyle/>
           <a:p>
-            <a:pPr indent="0" marL="0">
+            <a:pPr marL="0" indent="0">
               <a:buNone/>
             </a:pPr>
             <a:r>
@@ -2480,7 +2829,7 @@
                   <a:srgbClr val="5D6D7E"/>
                 </a:solidFill>
               </a:rPr>
-              <a:t>Tasa de Crecimiento Anual Compuesta suavizada. Combina CAGR histórico (60%) y reciente (40%).</a:t>
+              <a:t>Promedio móvil de ventana deslizante más ajuste de tendencia lineal basado en diferencias recientes.</a:t>
             </a:r>
             <a:endParaRPr lang="en-US" sz="1600" dirty="0"/>
           </a:p>
@@ -2507,7 +2856,7 @@
           <a:bodyPr wrap="square" rtlCol="0" anchor="ctr"/>
           <a:lstStyle/>
           <a:p>
-            <a:pPr indent="0" marL="0">
+            <a:pPr marL="0" indent="0">
               <a:buNone/>
             </a:pPr>
             <a:r>
@@ -2543,7 +2892,7 @@
           <a:bodyPr wrap="square" rtlCol="0" anchor="ctr"/>
           <a:lstStyle/>
           <a:p>
-            <a:pPr indent="0" marL="0">
+            <a:pPr marL="0" indent="0">
               <a:buNone/>
             </a:pPr>
             <a:r>
@@ -2552,7 +2901,7 @@
                   <a:srgbClr val="5D6D7E"/>
                 </a:solidFill>
               </a:rPr>
-              <a:t>Proyecciones conservadoras. Estabiliza volatilidad. Respeta el Sentido del indicador.</a:t>
+              <a:t>Suavizar ruido y capturar tendencia. Simple y robusto para indicadores estables.</a:t>
             </a:r>
             <a:endParaRPr lang="en-US" sz="1600" dirty="0"/>
           </a:p>
@@ -2579,7 +2928,7 @@
           <a:bodyPr wrap="square" rtlCol="0" anchor="ctr"/>
           <a:lstStyle/>
           <a:p>
-            <a:pPr indent="0" marL="0">
+            <a:pPr marL="0" indent="0">
               <a:buNone/>
             </a:pPr>
             <a:r>
@@ -2615,7 +2964,7 @@
           <a:bodyPr wrap="square" rtlCol="0" anchor="ctr"/>
           <a:lstStyle/>
           <a:p>
-            <a:pPr indent="0" marL="0">
+            <a:pPr marL="0" indent="0">
               <a:buNone/>
             </a:pPr>
             <a:r>
@@ -2627,12 +2976,12 @@
                 <a:ea typeface="Courier New" pitchFamily="34" charset="-122"/>
                 <a:cs typeface="Courier New" pitchFamily="34" charset="-120"/>
               </a:rPr>
-              <a:t>• baseline_growth: tasa suavizada</a:t>
+              <a:t>• window=3 (ventana de 3 periodos)</a:t>
             </a:r>
             <a:endParaRPr lang="en-US" sz="1400" dirty="0"/>
           </a:p>
           <a:p>
-            <a:pPr indent="0" marL="0">
+            <a:pPr marL="0" indent="0">
               <a:buNone/>
             </a:pPr>
             <a:r>
@@ -2644,12 +2993,12 @@
                 <a:ea typeface="Courier New" pitchFamily="34" charset="-122"/>
                 <a:cs typeface="Courier New" pitchFamily="34" charset="-120"/>
               </a:rPr>
-              <a:t>• CAGR_total: crecimiento histórico</a:t>
+              <a:t>• min_periods=1</a:t>
             </a:r>
             <a:endParaRPr lang="en-US" sz="1400" dirty="0"/>
           </a:p>
           <a:p>
-            <a:pPr indent="0" marL="0">
+            <a:pPr marL="0" indent="0">
               <a:buNone/>
             </a:pPr>
             <a:r>
@@ -2661,12 +3010,12 @@
                 <a:ea typeface="Courier New" pitchFamily="34" charset="-122"/>
                 <a:cs typeface="Courier New" pitchFamily="34" charset="-120"/>
               </a:rPr>
-              <a:t>• CAGR_recent: últimos 3 periodos</a:t>
+              <a:t>• trend: mean(diff(últimos 3))</a:t>
             </a:r>
             <a:endParaRPr lang="en-US" sz="1400" dirty="0"/>
           </a:p>
           <a:p>
-            <a:pPr indent="0" marL="0">
+            <a:pPr marL="0" indent="0">
               <a:buNone/>
             </a:pPr>
             <a:r>
@@ -2678,7 +3027,7 @@
                 <a:ea typeface="Courier New" pitchFamily="34" charset="-122"/>
                 <a:cs typeface="Courier New" pitchFamily="34" charset="-120"/>
               </a:rPr>
-              <a:t>• Validación por Sentido (Pos/Neg)</a:t>
+              <a:t>• Proyección: rolling_mean + trend×i</a:t>
             </a:r>
             <a:endParaRPr lang="en-US" sz="1400" dirty="0"/>
           </a:p>
@@ -2692,14 +3041,15 @@
 </p:sld>
 </file>
 
-<file path=ppt/slides/slide11.xml><?xml version="1.0" encoding="utf-8"?>
+<file path=ppt/slides/slide12.xml><?xml version="1.0" encoding="utf-8"?>
 <p:sld xmlns:a="http://schemas.openxmlformats.org/drawingml/2006/main" xmlns:r="http://schemas.openxmlformats.org/officeDocument/2006/relationships" xmlns:p="http://schemas.openxmlformats.org/presentationml/2006/main">
-  <p:cSld name="Slide 11">
+  <p:cSld name="Slide 12">
     <p:bg>
       <p:bgPr>
         <a:solidFill>
           <a:srgbClr val="FFFFFF"/>
         </a:solidFill>
+        <a:effectLst/>
       </p:bgPr>
     </p:bg>
     <p:spTree>
@@ -2737,7 +3087,7 @@
           <a:bodyPr wrap="square" rtlCol="0" anchor="ctr"/>
           <a:lstStyle/>
           <a:p>
-            <a:pPr indent="0" marL="0">
+            <a:pPr marL="0" indent="0">
               <a:buNone/>
             </a:pPr>
             <a:r>
@@ -2746,7 +3096,7 @@
                   <a:srgbClr val="1C2833"/>
                 </a:solidFill>
               </a:rPr>
-              <a:t>Media Móvil con Tendencia</a:t>
+              <a:t>Modelo Ensemble Promedio</a:t>
             </a:r>
             <a:endParaRPr lang="en-US" sz="4000" dirty="0"/>
           </a:p>
@@ -2776,6 +3126,13 @@
             <a:prstDash val="solid"/>
           </a:ln>
         </p:spPr>
+        <p:txBody>
+          <a:bodyPr/>
+          <a:lstStyle/>
+          <a:p>
+            <a:endParaRPr lang="es-419"/>
+          </a:p>
+        </p:txBody>
       </p:sp>
       <p:sp>
         <p:nvSpPr>
@@ -2798,13 +3155,13 @@
           <a:bodyPr wrap="square" rtlCol="0" anchor="ctr"/>
           <a:lstStyle/>
           <a:p>
-            <a:pPr indent="0" marL="0">
+            <a:pPr marL="0" indent="0">
               <a:buNone/>
             </a:pPr>
             <a:r>
               <a:rPr lang="en-US" sz="2000" b="1" dirty="0">
                 <a:solidFill>
-                  <a:srgbClr val="27AE60"/>
+                  <a:srgbClr val="2E4053"/>
                 </a:solidFill>
               </a:rPr>
               <a:t>Definición</a:t>
@@ -2834,7 +3191,7 @@
           <a:bodyPr wrap="square" rtlCol="0" anchor="ctr"/>
           <a:lstStyle/>
           <a:p>
-            <a:pPr indent="0" marL="0">
+            <a:pPr marL="0" indent="0">
               <a:buNone/>
             </a:pPr>
             <a:r>
@@ -2843,7 +3200,7 @@
                   <a:srgbClr val="5D6D7E"/>
                 </a:solidFill>
               </a:rPr>
-              <a:t>Promedio móvil de ventana deslizante más ajuste de tendencia lineal basado en diferencias recientes.</a:t>
+              <a:t>Promedio de las proyecciones de todos los modelos individuales disponibles. Reduce varianza y mejora estabilidad.</a:t>
             </a:r>
             <a:endParaRPr lang="en-US" sz="1600" dirty="0"/>
           </a:p>
@@ -2870,16 +3227,16 @@
           <a:bodyPr wrap="square" rtlCol="0" anchor="ctr"/>
           <a:lstStyle/>
           <a:p>
-            <a:pPr indent="0" marL="0">
+            <a:pPr marL="0" indent="0">
               <a:buNone/>
             </a:pPr>
             <a:r>
               <a:rPr lang="en-US" sz="2000" b="1" dirty="0">
                 <a:solidFill>
-                  <a:srgbClr val="27AE60"/>
-                </a:solidFill>
-              </a:rPr>
-              <a:t>Uso Principal</a:t>
+                  <a:srgbClr val="2E4053"/>
+                </a:solidFill>
+              </a:rPr>
+              <a:t>Cálculo</a:t>
             </a:r>
             <a:endParaRPr lang="en-US" sz="2000" dirty="0"/>
           </a:p>
@@ -2893,8 +3250,8 @@
         </p:nvSpPr>
         <p:spPr>
           <a:xfrm>
-            <a:off x="914400" y="2743200"/>
-            <a:ext cx="7315200" cy="457200"/>
+            <a:off x="1097280" y="2743200"/>
+            <a:ext cx="6858000" cy="457200"/>
           </a:xfrm>
           <a:prstGeom prst="rect">
             <a:avLst/>
@@ -2906,96 +3263,82 @@
           <a:bodyPr wrap="square" rtlCol="0" anchor="ctr"/>
           <a:lstStyle/>
           <a:p>
-            <a:pPr indent="0" marL="0">
-              <a:buNone/>
-            </a:pPr>
-            <a:r>
-              <a:rPr lang="en-US" sz="1600" dirty="0">
-                <a:solidFill>
-                  <a:srgbClr val="5D6D7E"/>
-                </a:solidFill>
-              </a:rPr>
-              <a:t>Suavizar ruido y capturar tendencia. Simple y robusto para indicadores estables.</a:t>
-            </a:r>
-            <a:endParaRPr lang="en-US" sz="1600" dirty="0"/>
-          </a:p>
-        </p:txBody>
-      </p:sp>
-      <p:sp>
-        <p:nvSpPr>
-          <p:cNvPr id="8" name="Text 6"/>
-          <p:cNvSpPr/>
-          <p:nvPr/>
-        </p:nvSpPr>
-        <p:spPr>
-          <a:xfrm>
-            <a:off x="914400" y="3291840"/>
-            <a:ext cx="7315200" cy="274320"/>
-          </a:xfrm>
-          <a:prstGeom prst="rect">
-            <a:avLst/>
-          </a:prstGeom>
-          <a:noFill/>
-          <a:ln/>
-        </p:spPr>
-        <p:txBody>
-          <a:bodyPr wrap="square" rtlCol="0" anchor="ctr"/>
-          <a:lstStyle/>
-          <a:p>
-            <a:pPr indent="0" marL="0">
-              <a:buNone/>
-            </a:pPr>
-            <a:r>
-              <a:rPr lang="en-US" sz="2000" b="1" dirty="0">
-                <a:solidFill>
-                  <a:srgbClr val="27AE60"/>
-                </a:solidFill>
-              </a:rPr>
-              <a:t>Parámetros Clave</a:t>
-            </a:r>
-            <a:endParaRPr lang="en-US" sz="2000" dirty="0"/>
-          </a:p>
-        </p:txBody>
-      </p:sp>
-      <p:sp>
-        <p:nvSpPr>
-          <p:cNvPr id="9" name="Text 7"/>
-          <p:cNvSpPr/>
-          <p:nvPr/>
-        </p:nvSpPr>
-        <p:spPr>
-          <a:xfrm>
-            <a:off x="1097280" y="3657600"/>
-            <a:ext cx="6858000" cy="822960"/>
-          </a:xfrm>
-          <a:prstGeom prst="rect">
-            <a:avLst/>
-          </a:prstGeom>
-          <a:noFill/>
-          <a:ln/>
-        </p:spPr>
-        <p:txBody>
-          <a:bodyPr wrap="square" rtlCol="0" anchor="ctr"/>
-          <a:lstStyle/>
-          <a:p>
-            <a:pPr indent="0" marL="0">
+            <a:pPr marL="0" indent="0">
               <a:buNone/>
             </a:pPr>
             <a:r>
               <a:rPr lang="en-US" sz="1400" dirty="0">
                 <a:solidFill>
-                  <a:srgbClr val="5D6D7E"/>
+                  <a:srgbClr val="E74C3C"/>
                 </a:solidFill>
                 <a:latin typeface="Courier New" pitchFamily="34" charset="0"/>
                 <a:ea typeface="Courier New" pitchFamily="34" charset="-122"/>
                 <a:cs typeface="Courier New" pitchFamily="34" charset="-120"/>
               </a:rPr>
-              <a:t>• window=3 (ventana de 3 periodos)</a:t>
+              <a:t>Ensemble = mean([Lineal, Poly2, Poly3, RF, GB, Exp, ARIMA, CAGR, MA])</a:t>
             </a:r>
             <a:endParaRPr lang="en-US" sz="1400" dirty="0"/>
           </a:p>
-          <a:p>
-            <a:pPr indent="0" marL="0">
+        </p:txBody>
+      </p:sp>
+      <p:sp>
+        <p:nvSpPr>
+          <p:cNvPr id="8" name="Text 6"/>
+          <p:cNvSpPr/>
+          <p:nvPr/>
+        </p:nvSpPr>
+        <p:spPr>
+          <a:xfrm>
+            <a:off x="914400" y="3383280"/>
+            <a:ext cx="7315200" cy="274320"/>
+          </a:xfrm>
+          <a:prstGeom prst="rect">
+            <a:avLst/>
+          </a:prstGeom>
+          <a:noFill/>
+          <a:ln/>
+        </p:spPr>
+        <p:txBody>
+          <a:bodyPr wrap="square" rtlCol="0" anchor="ctr"/>
+          <a:lstStyle/>
+          <a:p>
+            <a:pPr marL="0" indent="0">
+              <a:buNone/>
+            </a:pPr>
+            <a:r>
+              <a:rPr lang="en-US" sz="2000" b="1" dirty="0">
+                <a:solidFill>
+                  <a:srgbClr val="2E4053"/>
+                </a:solidFill>
+              </a:rPr>
+              <a:t>Ventajas</a:t>
+            </a:r>
+            <a:endParaRPr lang="en-US" sz="2000" dirty="0"/>
+          </a:p>
+        </p:txBody>
+      </p:sp>
+      <p:sp>
+        <p:nvSpPr>
+          <p:cNvPr id="9" name="Text 7"/>
+          <p:cNvSpPr/>
+          <p:nvPr/>
+        </p:nvSpPr>
+        <p:spPr>
+          <a:xfrm>
+            <a:off x="1097280" y="3749040"/>
+            <a:ext cx="6858000" cy="731520"/>
+          </a:xfrm>
+          <a:prstGeom prst="rect">
+            <a:avLst/>
+          </a:prstGeom>
+          <a:noFill/>
+          <a:ln/>
+        </p:spPr>
+        <p:txBody>
+          <a:bodyPr wrap="square" rtlCol="0" anchor="ctr"/>
+          <a:lstStyle/>
+          <a:p>
+            <a:pPr marL="0" indent="0">
               <a:buNone/>
             </a:pPr>
             <a:r>
@@ -3003,16 +3346,13 @@
                 <a:solidFill>
                   <a:srgbClr val="5D6D7E"/>
                 </a:solidFill>
-                <a:latin typeface="Courier New" pitchFamily="34" charset="0"/>
-                <a:ea typeface="Courier New" pitchFamily="34" charset="-122"/>
-                <a:cs typeface="Courier New" pitchFamily="34" charset="-120"/>
-              </a:rPr>
-              <a:t>• min_periods=1</a:t>
+              </a:rPr>
+              <a:t>• Reduce overfitting de modelos individuales</a:t>
             </a:r>
             <a:endParaRPr lang="en-US" sz="1400" dirty="0"/>
           </a:p>
           <a:p>
-            <a:pPr indent="0" marL="0">
+            <a:pPr marL="0" indent="0">
               <a:buNone/>
             </a:pPr>
             <a:r>
@@ -3020,16 +3360,13 @@
                 <a:solidFill>
                   <a:srgbClr val="5D6D7E"/>
                 </a:solidFill>
-                <a:latin typeface="Courier New" pitchFamily="34" charset="0"/>
-                <a:ea typeface="Courier New" pitchFamily="34" charset="-122"/>
-                <a:cs typeface="Courier New" pitchFamily="34" charset="-120"/>
-              </a:rPr>
-              <a:t>• trend: mean(diff(últimos 3))</a:t>
+              </a:rPr>
+              <a:t>• Mayor robustez ante cambios</a:t>
             </a:r>
             <a:endParaRPr lang="en-US" sz="1400" dirty="0"/>
           </a:p>
           <a:p>
-            <a:pPr indent="0" marL="0">
+            <a:pPr marL="0" indent="0">
               <a:buNone/>
             </a:pPr>
             <a:r>
@@ -3037,11 +3374,8 @@
                 <a:solidFill>
                   <a:srgbClr val="5D6D7E"/>
                 </a:solidFill>
-                <a:latin typeface="Courier New" pitchFamily="34" charset="0"/>
-                <a:ea typeface="Courier New" pitchFamily="34" charset="-122"/>
-                <a:cs typeface="Courier New" pitchFamily="34" charset="-120"/>
-              </a:rPr>
-              <a:t>• Proyección: rolling_mean + trend×i</a:t>
+              </a:rPr>
+              <a:t>• Mejor generalización</a:t>
             </a:r>
             <a:endParaRPr lang="en-US" sz="1400" dirty="0"/>
           </a:p>
@@ -3055,14 +3389,15 @@
 </p:sld>
 </file>
 
-<file path=ppt/slides/slide12.xml><?xml version="1.0" encoding="utf-8"?>
+<file path=ppt/slides/slide13.xml><?xml version="1.0" encoding="utf-8"?>
 <p:sld xmlns:a="http://schemas.openxmlformats.org/drawingml/2006/main" xmlns:r="http://schemas.openxmlformats.org/officeDocument/2006/relationships" xmlns:p="http://schemas.openxmlformats.org/presentationml/2006/main">
-  <p:cSld name="Slide 12">
+  <p:cSld name="Slide 13">
     <p:bg>
       <p:bgPr>
         <a:solidFill>
           <a:srgbClr val="FFFFFF"/>
         </a:solidFill>
+        <a:effectLst/>
       </p:bgPr>
     </p:bg>
     <p:spTree>
@@ -3087,7 +3422,7 @@
         </p:nvSpPr>
         <p:spPr>
           <a:xfrm>
-            <a:off x="457200" y="457200"/>
+            <a:off x="457200" y="365760"/>
             <a:ext cx="8229600" cy="640080"/>
           </a:xfrm>
           <a:prstGeom prst="rect">
@@ -3100,347 +3435,7 @@
           <a:bodyPr wrap="square" rtlCol="0" anchor="ctr"/>
           <a:lstStyle/>
           <a:p>
-            <a:pPr indent="0" marL="0">
-              <a:buNone/>
-            </a:pPr>
-            <a:r>
-              <a:rPr lang="en-US" sz="4000" b="1" dirty="0">
-                <a:solidFill>
-                  <a:srgbClr val="1C2833"/>
-                </a:solidFill>
-              </a:rPr>
-              <a:t>Modelo Ensemble Promedio</a:t>
-            </a:r>
-            <a:endParaRPr lang="en-US" sz="4000" dirty="0"/>
-          </a:p>
-        </p:txBody>
-      </p:sp>
-      <p:sp>
-        <p:nvSpPr>
-          <p:cNvPr id="3" name="Shape 1"/>
-          <p:cNvSpPr/>
-          <p:nvPr/>
-        </p:nvSpPr>
-        <p:spPr>
-          <a:xfrm>
-            <a:off x="731520" y="1188720"/>
-            <a:ext cx="7680960" cy="3383280"/>
-          </a:xfrm>
-          <a:prstGeom prst="rect">
-            <a:avLst/>
-          </a:prstGeom>
-          <a:solidFill>
-            <a:srgbClr val="F8F9FA"/>
-          </a:solidFill>
-          <a:ln w="12700">
-            <a:solidFill>
-              <a:srgbClr val="333333"/>
-            </a:solidFill>
-            <a:prstDash val="solid"/>
-          </a:ln>
-        </p:spPr>
-      </p:sp>
-      <p:sp>
-        <p:nvSpPr>
-          <p:cNvPr id="4" name="Text 2"/>
-          <p:cNvSpPr/>
-          <p:nvPr/>
-        </p:nvSpPr>
-        <p:spPr>
-          <a:xfrm>
-            <a:off x="914400" y="1371600"/>
-            <a:ext cx="7315200" cy="274320"/>
-          </a:xfrm>
-          <a:prstGeom prst="rect">
-            <a:avLst/>
-          </a:prstGeom>
-          <a:noFill/>
-          <a:ln/>
-        </p:spPr>
-        <p:txBody>
-          <a:bodyPr wrap="square" rtlCol="0" anchor="ctr"/>
-          <a:lstStyle/>
-          <a:p>
-            <a:pPr indent="0" marL="0">
-              <a:buNone/>
-            </a:pPr>
-            <a:r>
-              <a:rPr lang="en-US" sz="2000" b="1" dirty="0">
-                <a:solidFill>
-                  <a:srgbClr val="2E4053"/>
-                </a:solidFill>
-              </a:rPr>
-              <a:t>Definición</a:t>
-            </a:r>
-            <a:endParaRPr lang="en-US" sz="2000" dirty="0"/>
-          </a:p>
-        </p:txBody>
-      </p:sp>
-      <p:sp>
-        <p:nvSpPr>
-          <p:cNvPr id="5" name="Text 3"/>
-          <p:cNvSpPr/>
-          <p:nvPr/>
-        </p:nvSpPr>
-        <p:spPr>
-          <a:xfrm>
-            <a:off x="914400" y="1737360"/>
-            <a:ext cx="7315200" cy="548640"/>
-          </a:xfrm>
-          <a:prstGeom prst="rect">
-            <a:avLst/>
-          </a:prstGeom>
-          <a:noFill/>
-          <a:ln/>
-        </p:spPr>
-        <p:txBody>
-          <a:bodyPr wrap="square" rtlCol="0" anchor="ctr"/>
-          <a:lstStyle/>
-          <a:p>
-            <a:pPr indent="0" marL="0">
-              <a:buNone/>
-            </a:pPr>
-            <a:r>
-              <a:rPr lang="en-US" sz="1600" dirty="0">
-                <a:solidFill>
-                  <a:srgbClr val="5D6D7E"/>
-                </a:solidFill>
-              </a:rPr>
-              <a:t>Promedio de las proyecciones de todos los modelos individuales disponibles. Reduce varianza y mejora estabilidad.</a:t>
-            </a:r>
-            <a:endParaRPr lang="en-US" sz="1600" dirty="0"/>
-          </a:p>
-        </p:txBody>
-      </p:sp>
-      <p:sp>
-        <p:nvSpPr>
-          <p:cNvPr id="6" name="Text 4"/>
-          <p:cNvSpPr/>
-          <p:nvPr/>
-        </p:nvSpPr>
-        <p:spPr>
-          <a:xfrm>
-            <a:off x="914400" y="2377440"/>
-            <a:ext cx="7315200" cy="274320"/>
-          </a:xfrm>
-          <a:prstGeom prst="rect">
-            <a:avLst/>
-          </a:prstGeom>
-          <a:noFill/>
-          <a:ln/>
-        </p:spPr>
-        <p:txBody>
-          <a:bodyPr wrap="square" rtlCol="0" anchor="ctr"/>
-          <a:lstStyle/>
-          <a:p>
-            <a:pPr indent="0" marL="0">
-              <a:buNone/>
-            </a:pPr>
-            <a:r>
-              <a:rPr lang="en-US" sz="2000" b="1" dirty="0">
-                <a:solidFill>
-                  <a:srgbClr val="2E4053"/>
-                </a:solidFill>
-              </a:rPr>
-              <a:t>Cálculo</a:t>
-            </a:r>
-            <a:endParaRPr lang="en-US" sz="2000" dirty="0"/>
-          </a:p>
-        </p:txBody>
-      </p:sp>
-      <p:sp>
-        <p:nvSpPr>
-          <p:cNvPr id="7" name="Text 5"/>
-          <p:cNvSpPr/>
-          <p:nvPr/>
-        </p:nvSpPr>
-        <p:spPr>
-          <a:xfrm>
-            <a:off x="1097280" y="2743200"/>
-            <a:ext cx="6858000" cy="457200"/>
-          </a:xfrm>
-          <a:prstGeom prst="rect">
-            <a:avLst/>
-          </a:prstGeom>
-          <a:noFill/>
-          <a:ln/>
-        </p:spPr>
-        <p:txBody>
-          <a:bodyPr wrap="square" rtlCol="0" anchor="ctr"/>
-          <a:lstStyle/>
-          <a:p>
-            <a:pPr indent="0" marL="0">
-              <a:buNone/>
-            </a:pPr>
-            <a:r>
-              <a:rPr lang="en-US" sz="1400" dirty="0">
-                <a:solidFill>
-                  <a:srgbClr val="E74C3C"/>
-                </a:solidFill>
-                <a:latin typeface="Courier New" pitchFamily="34" charset="0"/>
-                <a:ea typeface="Courier New" pitchFamily="34" charset="-122"/>
-                <a:cs typeface="Courier New" pitchFamily="34" charset="-120"/>
-              </a:rPr>
-              <a:t>Ensemble = mean([Lineal, Poly2, Poly3, RF, GB, Exp, ARIMA, CAGR, MA])</a:t>
-            </a:r>
-            <a:endParaRPr lang="en-US" sz="1400" dirty="0"/>
-          </a:p>
-        </p:txBody>
-      </p:sp>
-      <p:sp>
-        <p:nvSpPr>
-          <p:cNvPr id="8" name="Text 6"/>
-          <p:cNvSpPr/>
-          <p:nvPr/>
-        </p:nvSpPr>
-        <p:spPr>
-          <a:xfrm>
-            <a:off x="914400" y="3383280"/>
-            <a:ext cx="7315200" cy="274320"/>
-          </a:xfrm>
-          <a:prstGeom prst="rect">
-            <a:avLst/>
-          </a:prstGeom>
-          <a:noFill/>
-          <a:ln/>
-        </p:spPr>
-        <p:txBody>
-          <a:bodyPr wrap="square" rtlCol="0" anchor="ctr"/>
-          <a:lstStyle/>
-          <a:p>
-            <a:pPr indent="0" marL="0">
-              <a:buNone/>
-            </a:pPr>
-            <a:r>
-              <a:rPr lang="en-US" sz="2000" b="1" dirty="0">
-                <a:solidFill>
-                  <a:srgbClr val="2E4053"/>
-                </a:solidFill>
-              </a:rPr>
-              <a:t>Ventajas</a:t>
-            </a:r>
-            <a:endParaRPr lang="en-US" sz="2000" dirty="0"/>
-          </a:p>
-        </p:txBody>
-      </p:sp>
-      <p:sp>
-        <p:nvSpPr>
-          <p:cNvPr id="9" name="Text 7"/>
-          <p:cNvSpPr/>
-          <p:nvPr/>
-        </p:nvSpPr>
-        <p:spPr>
-          <a:xfrm>
-            <a:off x="1097280" y="3749040"/>
-            <a:ext cx="6858000" cy="731520"/>
-          </a:xfrm>
-          <a:prstGeom prst="rect">
-            <a:avLst/>
-          </a:prstGeom>
-          <a:noFill/>
-          <a:ln/>
-        </p:spPr>
-        <p:txBody>
-          <a:bodyPr wrap="square" rtlCol="0" anchor="ctr"/>
-          <a:lstStyle/>
-          <a:p>
-            <a:pPr indent="0" marL="0">
-              <a:buNone/>
-            </a:pPr>
-            <a:r>
-              <a:rPr lang="en-US" sz="1400" dirty="0">
-                <a:solidFill>
-                  <a:srgbClr val="5D6D7E"/>
-                </a:solidFill>
-              </a:rPr>
-              <a:t>• Reduce overfitting de modelos individuales</a:t>
-            </a:r>
-            <a:endParaRPr lang="en-US" sz="1400" dirty="0"/>
-          </a:p>
-          <a:p>
-            <a:pPr indent="0" marL="0">
-              <a:buNone/>
-            </a:pPr>
-            <a:r>
-              <a:rPr lang="en-US" sz="1400" dirty="0">
-                <a:solidFill>
-                  <a:srgbClr val="5D6D7E"/>
-                </a:solidFill>
-              </a:rPr>
-              <a:t>• Mayor robustez ante cambios</a:t>
-            </a:r>
-            <a:endParaRPr lang="en-US" sz="1400" dirty="0"/>
-          </a:p>
-          <a:p>
-            <a:pPr indent="0" marL="0">
-              <a:buNone/>
-            </a:pPr>
-            <a:r>
-              <a:rPr lang="en-US" sz="1400" dirty="0">
-                <a:solidFill>
-                  <a:srgbClr val="5D6D7E"/>
-                </a:solidFill>
-              </a:rPr>
-              <a:t>• Mejor generalización</a:t>
-            </a:r>
-            <a:endParaRPr lang="en-US" sz="1400" dirty="0"/>
-          </a:p>
-        </p:txBody>
-      </p:sp>
-    </p:spTree>
-  </p:cSld>
-  <p:clrMapOvr>
-    <a:masterClrMapping/>
-  </p:clrMapOvr>
-</p:sld>
-</file>
-
-<file path=ppt/slides/slide13.xml><?xml version="1.0" encoding="utf-8"?>
-<p:sld xmlns:a="http://schemas.openxmlformats.org/drawingml/2006/main" xmlns:r="http://schemas.openxmlformats.org/officeDocument/2006/relationships" xmlns:p="http://schemas.openxmlformats.org/presentationml/2006/main">
-  <p:cSld name="Slide 13">
-    <p:bg>
-      <p:bgPr>
-        <a:solidFill>
-          <a:srgbClr val="FFFFFF"/>
-        </a:solidFill>
-      </p:bgPr>
-    </p:bg>
-    <p:spTree>
-      <p:nvGrpSpPr>
-        <p:cNvPr id="1" name=""/>
-        <p:cNvGrpSpPr/>
-        <p:nvPr/>
-      </p:nvGrpSpPr>
-      <p:grpSpPr>
-        <a:xfrm>
-          <a:off x="0" y="0"/>
-          <a:ext cx="0" cy="0"/>
-          <a:chOff x="0" y="0"/>
-          <a:chExt cx="0" cy="0"/>
-        </a:xfrm>
-      </p:grpSpPr>
-      <p:sp>
-        <p:nvSpPr>
-          <p:cNvPr id="2" name="Text 0"/>
-          <p:cNvSpPr/>
-          <p:nvPr/>
-        </p:nvSpPr>
-        <p:spPr>
-          <a:xfrm>
-            <a:off x="457200" y="365760"/>
-            <a:ext cx="8229600" cy="640080"/>
-          </a:xfrm>
-          <a:prstGeom prst="rect">
-            <a:avLst/>
-          </a:prstGeom>
-          <a:noFill/>
-          <a:ln/>
-        </p:spPr>
-        <p:txBody>
-          <a:bodyPr wrap="square" rtlCol="0" anchor="ctr"/>
-          <a:lstStyle/>
-          <a:p>
-            <a:pPr indent="0" marL="0">
+            <a:pPr marL="0" indent="0">
               <a:buNone/>
             </a:pPr>
             <a:r>
@@ -3471,16 +3466,34 @@
         </p:nvGraphicFramePr>
         <p:xfrm>
           <a:off x="640080" y="1097280"/>
-          <a:ext cx="7863840" cy="3383280"/>
+          <a:ext cx="7863840" cy="3383281"/>
         </p:xfrm>
         <a:graphic>
           <a:graphicData uri="http://schemas.openxmlformats.org/drawingml/2006/table">
             <a:tbl>
               <a:tblPr/>
               <a:tblGrid>
-                <a:gridCol w="3200400"/>
-                <a:gridCol w="1371600"/>
-                <a:gridCol w="3291840"/>
+                <a:gridCol w="3200400">
+                  <a:extLst>
+                    <a:ext uri="{9D8B030D-6E8A-4147-A177-3AD203B41FA5}">
+                      <a16:colId xmlns:a16="http://schemas.microsoft.com/office/drawing/2014/main" val="20000"/>
+                    </a:ext>
+                  </a:extLst>
+                </a:gridCol>
+                <a:gridCol w="1371600">
+                  <a:extLst>
+                    <a:ext uri="{9D8B030D-6E8A-4147-A177-3AD203B41FA5}">
+                      <a16:colId xmlns:a16="http://schemas.microsoft.com/office/drawing/2014/main" val="20001"/>
+                    </a:ext>
+                  </a:extLst>
+                </a:gridCol>
+                <a:gridCol w="3291840">
+                  <a:extLst>
+                    <a:ext uri="{9D8B030D-6E8A-4147-A177-3AD203B41FA5}">
+                      <a16:colId xmlns:a16="http://schemas.microsoft.com/office/drawing/2014/main" val="20002"/>
+                    </a:ext>
+                  </a:extLst>
+                </a:gridCol>
               </a:tblGrid>
               <a:tr h="307571">
                 <a:tc>
@@ -3488,7 +3501,7 @@
                     <a:bodyPr/>
                     <a:lstStyle/>
                     <a:p>
-                      <a:pPr algn="l" indent="0" marL="0">
+                      <a:pPr marL="0" indent="0" algn="l">
                         <a:buNone/>
                       </a:pPr>
                       <a:r>
@@ -3502,7 +3515,7 @@
                       <a:endParaRPr lang="en-US" sz="1200" dirty="0"/>
                     </a:p>
                   </a:txBody>
-                  <a:tcPr marL="91440" marR="91440" marT="45720" marB="45720" anchor="ctr">
+                  <a:tcPr anchor="ctr">
                     <a:lnL w="12700" cap="flat" cmpd="sng" algn="ctr">
                       <a:solidFill>
                         <a:srgbClr val="CCCCCC"/>
@@ -3549,7 +3562,7 @@
                     <a:bodyPr/>
                     <a:lstStyle/>
                     <a:p>
-                      <a:pPr algn="l" indent="0" marL="0">
+                      <a:pPr marL="0" indent="0" algn="l">
                         <a:buNone/>
                       </a:pPr>
                       <a:r>
@@ -3563,7 +3576,7 @@
                       <a:endParaRPr lang="en-US" sz="1200" dirty="0"/>
                     </a:p>
                   </a:txBody>
-                  <a:tcPr marL="91440" marR="91440" marT="45720" marB="45720" anchor="ctr">
+                  <a:tcPr anchor="ctr">
                     <a:lnL w="12700" cap="flat" cmpd="sng" algn="ctr">
                       <a:solidFill>
                         <a:srgbClr val="CCCCCC"/>
@@ -3610,7 +3623,7 @@
                     <a:bodyPr/>
                     <a:lstStyle/>
                     <a:p>
-                      <a:pPr algn="l" indent="0" marL="0">
+                      <a:pPr marL="0" indent="0" algn="l">
                         <a:buNone/>
                       </a:pPr>
                       <a:r>
@@ -3624,7 +3637,7 @@
                       <a:endParaRPr lang="en-US" sz="1200" dirty="0"/>
                     </a:p>
                   </a:txBody>
-                  <a:tcPr marL="91440" marR="91440" marT="45720" marB="45720" anchor="ctr">
+                  <a:tcPr anchor="ctr">
                     <a:lnL w="12700" cap="flat" cmpd="sng" algn="ctr">
                       <a:solidFill>
                         <a:srgbClr val="CCCCCC"/>
@@ -3666,6 +3679,11 @@
                     </a:solidFill>
                   </a:tcPr>
                 </a:tc>
+                <a:extLst>
+                  <a:ext uri="{0D108BD9-81ED-4DB2-BD59-A6C34878D82A}">
+                    <a16:rowId xmlns:a16="http://schemas.microsoft.com/office/drawing/2014/main" val="10000"/>
+                  </a:ext>
+                </a:extLst>
               </a:tr>
               <a:tr h="307571">
                 <a:tc>
@@ -3673,7 +3691,7 @@
                     <a:bodyPr/>
                     <a:lstStyle/>
                     <a:p>
-                      <a:pPr algn="l" indent="0" marL="0">
+                      <a:pPr marL="0" indent="0" algn="l">
                         <a:buNone/>
                       </a:pPr>
                       <a:r>
@@ -3687,7 +3705,7 @@
                       <a:endParaRPr lang="en-US" sz="1200" dirty="0"/>
                     </a:p>
                   </a:txBody>
-                  <a:tcPr marL="91440" marR="91440" marT="45720" marB="45720" anchor="ctr">
+                  <a:tcPr anchor="ctr">
                     <a:lnL w="12700" cap="flat" cmpd="sng" algn="ctr">
                       <a:solidFill>
                         <a:srgbClr val="CCCCCC"/>
@@ -3734,7 +3752,7 @@
                     <a:bodyPr/>
                     <a:lstStyle/>
                     <a:p>
-                      <a:pPr algn="l" indent="0" marL="0">
+                      <a:pPr marL="0" indent="0" algn="l">
                         <a:buNone/>
                       </a:pPr>
                       <a:r>
@@ -3748,7 +3766,7 @@
                       <a:endParaRPr lang="en-US" sz="1200" dirty="0"/>
                     </a:p>
                   </a:txBody>
-                  <a:tcPr marL="91440" marR="91440" marT="45720" marB="45720" anchor="ctr">
+                  <a:tcPr anchor="ctr">
                     <a:lnL w="12700" cap="flat" cmpd="sng" algn="ctr">
                       <a:solidFill>
                         <a:srgbClr val="CCCCCC"/>
@@ -3795,7 +3813,7 @@
                     <a:bodyPr/>
                     <a:lstStyle/>
                     <a:p>
-                      <a:pPr algn="l" indent="0" marL="0">
+                      <a:pPr marL="0" indent="0" algn="l">
                         <a:buNone/>
                       </a:pPr>
                       <a:r>
@@ -3809,7 +3827,7 @@
                       <a:endParaRPr lang="en-US" sz="1200" dirty="0"/>
                     </a:p>
                   </a:txBody>
-                  <a:tcPr marL="91440" marR="91440" marT="45720" marB="45720" anchor="ctr">
+                  <a:tcPr anchor="ctr">
                     <a:lnL w="12700" cap="flat" cmpd="sng" algn="ctr">
                       <a:solidFill>
                         <a:srgbClr val="CCCCCC"/>
@@ -3851,6 +3869,11 @@
                     </a:solidFill>
                   </a:tcPr>
                 </a:tc>
+                <a:extLst>
+                  <a:ext uri="{0D108BD9-81ED-4DB2-BD59-A6C34878D82A}">
+                    <a16:rowId xmlns:a16="http://schemas.microsoft.com/office/drawing/2014/main" val="10001"/>
+                  </a:ext>
+                </a:extLst>
               </a:tr>
               <a:tr h="307571">
                 <a:tc>
@@ -3858,7 +3881,7 @@
                     <a:bodyPr/>
                     <a:lstStyle/>
                     <a:p>
-                      <a:pPr algn="l" indent="0" marL="0">
+                      <a:pPr marL="0" indent="0" algn="l">
                         <a:buNone/>
                       </a:pPr>
                       <a:r>
@@ -3872,7 +3895,7 @@
                       <a:endParaRPr lang="en-US" sz="1200" dirty="0"/>
                     </a:p>
                   </a:txBody>
-                  <a:tcPr marL="91440" marR="91440" marT="45720" marB="45720" anchor="ctr">
+                  <a:tcPr anchor="ctr">
                     <a:lnL w="12700" cap="flat" cmpd="sng" algn="ctr">
                       <a:solidFill>
                         <a:srgbClr val="CCCCCC"/>
@@ -3919,7 +3942,7 @@
                     <a:bodyPr/>
                     <a:lstStyle/>
                     <a:p>
-                      <a:pPr algn="l" indent="0" marL="0">
+                      <a:pPr marL="0" indent="0" algn="l">
                         <a:buNone/>
                       </a:pPr>
                       <a:r>
@@ -3933,7 +3956,7 @@
                       <a:endParaRPr lang="en-US" sz="1200" dirty="0"/>
                     </a:p>
                   </a:txBody>
-                  <a:tcPr marL="91440" marR="91440" marT="45720" marB="45720" anchor="ctr">
+                  <a:tcPr anchor="ctr">
                     <a:lnL w="12700" cap="flat" cmpd="sng" algn="ctr">
                       <a:solidFill>
                         <a:srgbClr val="CCCCCC"/>
@@ -3980,7 +4003,7 @@
                     <a:bodyPr/>
                     <a:lstStyle/>
                     <a:p>
-                      <a:pPr algn="l" indent="0" marL="0">
+                      <a:pPr marL="0" indent="0" algn="l">
                         <a:buNone/>
                       </a:pPr>
                       <a:r>
@@ -3994,7 +4017,7 @@
                       <a:endParaRPr lang="en-US" sz="1200" dirty="0"/>
                     </a:p>
                   </a:txBody>
-                  <a:tcPr marL="91440" marR="91440" marT="45720" marB="45720" anchor="ctr">
+                  <a:tcPr anchor="ctr">
                     <a:lnL w="12700" cap="flat" cmpd="sng" algn="ctr">
                       <a:solidFill>
                         <a:srgbClr val="CCCCCC"/>
@@ -4036,6 +4059,11 @@
                     </a:solidFill>
                   </a:tcPr>
                 </a:tc>
+                <a:extLst>
+                  <a:ext uri="{0D108BD9-81ED-4DB2-BD59-A6C34878D82A}">
+                    <a16:rowId xmlns:a16="http://schemas.microsoft.com/office/drawing/2014/main" val="10002"/>
+                  </a:ext>
+                </a:extLst>
               </a:tr>
               <a:tr h="307571">
                 <a:tc>
@@ -4043,7 +4071,7 @@
                     <a:bodyPr/>
                     <a:lstStyle/>
                     <a:p>
-                      <a:pPr algn="l" indent="0" marL="0">
+                      <a:pPr marL="0" indent="0" algn="l">
                         <a:buNone/>
                       </a:pPr>
                       <a:r>
@@ -4057,7 +4085,7 @@
                       <a:endParaRPr lang="en-US" sz="1200" dirty="0"/>
                     </a:p>
                   </a:txBody>
-                  <a:tcPr marL="91440" marR="91440" marT="45720" marB="45720" anchor="ctr">
+                  <a:tcPr anchor="ctr">
                     <a:lnL w="12700" cap="flat" cmpd="sng" algn="ctr">
                       <a:solidFill>
                         <a:srgbClr val="CCCCCC"/>
@@ -4104,7 +4132,7 @@
                     <a:bodyPr/>
                     <a:lstStyle/>
                     <a:p>
-                      <a:pPr algn="l" indent="0" marL="0">
+                      <a:pPr marL="0" indent="0" algn="l">
                         <a:buNone/>
                       </a:pPr>
                       <a:r>
@@ -4118,7 +4146,7 @@
                       <a:endParaRPr lang="en-US" sz="1200" dirty="0"/>
                     </a:p>
                   </a:txBody>
-                  <a:tcPr marL="91440" marR="91440" marT="45720" marB="45720" anchor="ctr">
+                  <a:tcPr anchor="ctr">
                     <a:lnL w="12700" cap="flat" cmpd="sng" algn="ctr">
                       <a:solidFill>
                         <a:srgbClr val="CCCCCC"/>
@@ -4165,7 +4193,7 @@
                     <a:bodyPr/>
                     <a:lstStyle/>
                     <a:p>
-                      <a:pPr algn="l" indent="0" marL="0">
+                      <a:pPr marL="0" indent="0" algn="l">
                         <a:buNone/>
                       </a:pPr>
                       <a:r>
@@ -4179,7 +4207,7 @@
                       <a:endParaRPr lang="en-US" sz="1200" dirty="0"/>
                     </a:p>
                   </a:txBody>
-                  <a:tcPr marL="91440" marR="91440" marT="45720" marB="45720" anchor="ctr">
+                  <a:tcPr anchor="ctr">
                     <a:lnL w="12700" cap="flat" cmpd="sng" algn="ctr">
                       <a:solidFill>
                         <a:srgbClr val="CCCCCC"/>
@@ -4221,6 +4249,11 @@
                     </a:solidFill>
                   </a:tcPr>
                 </a:tc>
+                <a:extLst>
+                  <a:ext uri="{0D108BD9-81ED-4DB2-BD59-A6C34878D82A}">
+                    <a16:rowId xmlns:a16="http://schemas.microsoft.com/office/drawing/2014/main" val="10003"/>
+                  </a:ext>
+                </a:extLst>
               </a:tr>
               <a:tr h="307571">
                 <a:tc>
@@ -4228,7 +4261,7 @@
                     <a:bodyPr/>
                     <a:lstStyle/>
                     <a:p>
-                      <a:pPr algn="l" indent="0" marL="0">
+                      <a:pPr marL="0" indent="0" algn="l">
                         <a:buNone/>
                       </a:pPr>
                       <a:r>
@@ -4242,7 +4275,7 @@
                       <a:endParaRPr lang="en-US" sz="1200" dirty="0"/>
                     </a:p>
                   </a:txBody>
-                  <a:tcPr marL="91440" marR="91440" marT="45720" marB="45720" anchor="ctr">
+                  <a:tcPr anchor="ctr">
                     <a:lnL w="12700" cap="flat" cmpd="sng" algn="ctr">
                       <a:solidFill>
                         <a:srgbClr val="CCCCCC"/>
@@ -4289,7 +4322,7 @@
                     <a:bodyPr/>
                     <a:lstStyle/>
                     <a:p>
-                      <a:pPr algn="l" indent="0" marL="0">
+                      <a:pPr marL="0" indent="0" algn="l">
                         <a:buNone/>
                       </a:pPr>
                       <a:r>
@@ -4303,7 +4336,7 @@
                       <a:endParaRPr lang="en-US" sz="1200" dirty="0"/>
                     </a:p>
                   </a:txBody>
-                  <a:tcPr marL="91440" marR="91440" marT="45720" marB="45720" anchor="ctr">
+                  <a:tcPr anchor="ctr">
                     <a:lnL w="12700" cap="flat" cmpd="sng" algn="ctr">
                       <a:solidFill>
                         <a:srgbClr val="CCCCCC"/>
@@ -4350,7 +4383,7 @@
                     <a:bodyPr/>
                     <a:lstStyle/>
                     <a:p>
-                      <a:pPr algn="l" indent="0" marL="0">
+                      <a:pPr marL="0" indent="0" algn="l">
                         <a:buNone/>
                       </a:pPr>
                       <a:r>
@@ -4364,7 +4397,7 @@
                       <a:endParaRPr lang="en-US" sz="1200" dirty="0"/>
                     </a:p>
                   </a:txBody>
-                  <a:tcPr marL="91440" marR="91440" marT="45720" marB="45720" anchor="ctr">
+                  <a:tcPr anchor="ctr">
                     <a:lnL w="12700" cap="flat" cmpd="sng" algn="ctr">
                       <a:solidFill>
                         <a:srgbClr val="CCCCCC"/>
@@ -4406,6 +4439,11 @@
                     </a:solidFill>
                   </a:tcPr>
                 </a:tc>
+                <a:extLst>
+                  <a:ext uri="{0D108BD9-81ED-4DB2-BD59-A6C34878D82A}">
+                    <a16:rowId xmlns:a16="http://schemas.microsoft.com/office/drawing/2014/main" val="10004"/>
+                  </a:ext>
+                </a:extLst>
               </a:tr>
               <a:tr h="307571">
                 <a:tc>
@@ -4413,7 +4451,7 @@
                     <a:bodyPr/>
                     <a:lstStyle/>
                     <a:p>
-                      <a:pPr algn="l" indent="0" marL="0">
+                      <a:pPr marL="0" indent="0" algn="l">
                         <a:buNone/>
                       </a:pPr>
                       <a:r>
@@ -4427,7 +4465,7 @@
                       <a:endParaRPr lang="en-US" sz="1200" dirty="0"/>
                     </a:p>
                   </a:txBody>
-                  <a:tcPr marL="91440" marR="91440" marT="45720" marB="45720" anchor="ctr">
+                  <a:tcPr anchor="ctr">
                     <a:lnL w="12700" cap="flat" cmpd="sng" algn="ctr">
                       <a:solidFill>
                         <a:srgbClr val="CCCCCC"/>
@@ -4474,7 +4512,7 @@
                     <a:bodyPr/>
                     <a:lstStyle/>
                     <a:p>
-                      <a:pPr algn="l" indent="0" marL="0">
+                      <a:pPr marL="0" indent="0" algn="l">
                         <a:buNone/>
                       </a:pPr>
                       <a:r>
@@ -4488,7 +4526,7 @@
                       <a:endParaRPr lang="en-US" sz="1200" dirty="0"/>
                     </a:p>
                   </a:txBody>
-                  <a:tcPr marL="91440" marR="91440" marT="45720" marB="45720" anchor="ctr">
+                  <a:tcPr anchor="ctr">
                     <a:lnL w="12700" cap="flat" cmpd="sng" algn="ctr">
                       <a:solidFill>
                         <a:srgbClr val="CCCCCC"/>
@@ -4535,7 +4573,7 @@
                     <a:bodyPr/>
                     <a:lstStyle/>
                     <a:p>
-                      <a:pPr algn="l" indent="0" marL="0">
+                      <a:pPr marL="0" indent="0" algn="l">
                         <a:buNone/>
                       </a:pPr>
                       <a:r>
@@ -4549,7 +4587,7 @@
                       <a:endParaRPr lang="en-US" sz="1200" dirty="0"/>
                     </a:p>
                   </a:txBody>
-                  <a:tcPr marL="91440" marR="91440" marT="45720" marB="45720" anchor="ctr">
+                  <a:tcPr anchor="ctr">
                     <a:lnL w="12700" cap="flat" cmpd="sng" algn="ctr">
                       <a:solidFill>
                         <a:srgbClr val="CCCCCC"/>
@@ -4591,6 +4629,11 @@
                     </a:solidFill>
                   </a:tcPr>
                 </a:tc>
+                <a:extLst>
+                  <a:ext uri="{0D108BD9-81ED-4DB2-BD59-A6C34878D82A}">
+                    <a16:rowId xmlns:a16="http://schemas.microsoft.com/office/drawing/2014/main" val="10005"/>
+                  </a:ext>
+                </a:extLst>
               </a:tr>
               <a:tr h="307571">
                 <a:tc>
@@ -4598,7 +4641,7 @@
                     <a:bodyPr/>
                     <a:lstStyle/>
                     <a:p>
-                      <a:pPr algn="l" indent="0" marL="0">
+                      <a:pPr marL="0" indent="0" algn="l">
                         <a:buNone/>
                       </a:pPr>
                       <a:r>
@@ -4612,7 +4655,7 @@
                       <a:endParaRPr lang="en-US" sz="1200" dirty="0"/>
                     </a:p>
                   </a:txBody>
-                  <a:tcPr marL="91440" marR="91440" marT="45720" marB="45720" anchor="ctr">
+                  <a:tcPr anchor="ctr">
                     <a:lnL w="12700" cap="flat" cmpd="sng" algn="ctr">
                       <a:solidFill>
                         <a:srgbClr val="CCCCCC"/>
@@ -4659,7 +4702,7 @@
                     <a:bodyPr/>
                     <a:lstStyle/>
                     <a:p>
-                      <a:pPr algn="l" indent="0" marL="0">
+                      <a:pPr marL="0" indent="0" algn="l">
                         <a:buNone/>
                       </a:pPr>
                       <a:r>
@@ -4673,7 +4716,7 @@
                       <a:endParaRPr lang="en-US" sz="1200" dirty="0"/>
                     </a:p>
                   </a:txBody>
-                  <a:tcPr marL="91440" marR="91440" marT="45720" marB="45720" anchor="ctr">
+                  <a:tcPr anchor="ctr">
                     <a:lnL w="12700" cap="flat" cmpd="sng" algn="ctr">
                       <a:solidFill>
                         <a:srgbClr val="CCCCCC"/>
@@ -4720,7 +4763,7 @@
                     <a:bodyPr/>
                     <a:lstStyle/>
                     <a:p>
-                      <a:pPr algn="l" indent="0" marL="0">
+                      <a:pPr marL="0" indent="0" algn="l">
                         <a:buNone/>
                       </a:pPr>
                       <a:r>
@@ -4734,7 +4777,7 @@
                       <a:endParaRPr lang="en-US" sz="1200" dirty="0"/>
                     </a:p>
                   </a:txBody>
-                  <a:tcPr marL="91440" marR="91440" marT="45720" marB="45720" anchor="ctr">
+                  <a:tcPr anchor="ctr">
                     <a:lnL w="12700" cap="flat" cmpd="sng" algn="ctr">
                       <a:solidFill>
                         <a:srgbClr val="CCCCCC"/>
@@ -4776,6 +4819,11 @@
                     </a:solidFill>
                   </a:tcPr>
                 </a:tc>
+                <a:extLst>
+                  <a:ext uri="{0D108BD9-81ED-4DB2-BD59-A6C34878D82A}">
+                    <a16:rowId xmlns:a16="http://schemas.microsoft.com/office/drawing/2014/main" val="10006"/>
+                  </a:ext>
+                </a:extLst>
               </a:tr>
               <a:tr h="307571">
                 <a:tc>
@@ -4783,7 +4831,7 @@
                     <a:bodyPr/>
                     <a:lstStyle/>
                     <a:p>
-                      <a:pPr algn="l" indent="0" marL="0">
+                      <a:pPr marL="0" indent="0" algn="l">
                         <a:buNone/>
                       </a:pPr>
                       <a:r>
@@ -4797,7 +4845,7 @@
                       <a:endParaRPr lang="en-US" sz="1200" dirty="0"/>
                     </a:p>
                   </a:txBody>
-                  <a:tcPr marL="91440" marR="91440" marT="45720" marB="45720" anchor="ctr">
+                  <a:tcPr anchor="ctr">
                     <a:lnL w="12700" cap="flat" cmpd="sng" algn="ctr">
                       <a:solidFill>
                         <a:srgbClr val="CCCCCC"/>
@@ -4844,7 +4892,7 @@
                     <a:bodyPr/>
                     <a:lstStyle/>
                     <a:p>
-                      <a:pPr algn="l" indent="0" marL="0">
+                      <a:pPr marL="0" indent="0" algn="l">
                         <a:buNone/>
                       </a:pPr>
                       <a:r>
@@ -4858,7 +4906,7 @@
                       <a:endParaRPr lang="en-US" sz="1200" dirty="0"/>
                     </a:p>
                   </a:txBody>
-                  <a:tcPr marL="91440" marR="91440" marT="45720" marB="45720" anchor="ctr">
+                  <a:tcPr anchor="ctr">
                     <a:lnL w="12700" cap="flat" cmpd="sng" algn="ctr">
                       <a:solidFill>
                         <a:srgbClr val="CCCCCC"/>
@@ -4905,7 +4953,7 @@
                     <a:bodyPr/>
                     <a:lstStyle/>
                     <a:p>
-                      <a:pPr algn="l" indent="0" marL="0">
+                      <a:pPr marL="0" indent="0" algn="l">
                         <a:buNone/>
                       </a:pPr>
                       <a:r>
@@ -4919,7 +4967,7 @@
                       <a:endParaRPr lang="en-US" sz="1200" dirty="0"/>
                     </a:p>
                   </a:txBody>
-                  <a:tcPr marL="91440" marR="91440" marT="45720" marB="45720" anchor="ctr">
+                  <a:tcPr anchor="ctr">
                     <a:lnL w="12700" cap="flat" cmpd="sng" algn="ctr">
                       <a:solidFill>
                         <a:srgbClr val="CCCCCC"/>
@@ -4961,6 +5009,11 @@
                     </a:solidFill>
                   </a:tcPr>
                 </a:tc>
+                <a:extLst>
+                  <a:ext uri="{0D108BD9-81ED-4DB2-BD59-A6C34878D82A}">
+                    <a16:rowId xmlns:a16="http://schemas.microsoft.com/office/drawing/2014/main" val="10007"/>
+                  </a:ext>
+                </a:extLst>
               </a:tr>
               <a:tr h="307571">
                 <a:tc>
@@ -4968,7 +5021,7 @@
                     <a:bodyPr/>
                     <a:lstStyle/>
                     <a:p>
-                      <a:pPr algn="l" indent="0" marL="0">
+                      <a:pPr marL="0" indent="0" algn="l">
                         <a:buNone/>
                       </a:pPr>
                       <a:r>
@@ -4982,7 +5035,7 @@
                       <a:endParaRPr lang="en-US" sz="1200" dirty="0"/>
                     </a:p>
                   </a:txBody>
-                  <a:tcPr marL="91440" marR="91440" marT="45720" marB="45720" anchor="ctr">
+                  <a:tcPr anchor="ctr">
                     <a:lnL w="12700" cap="flat" cmpd="sng" algn="ctr">
                       <a:solidFill>
                         <a:srgbClr val="CCCCCC"/>
@@ -5029,7 +5082,7 @@
                     <a:bodyPr/>
                     <a:lstStyle/>
                     <a:p>
-                      <a:pPr algn="l" indent="0" marL="0">
+                      <a:pPr marL="0" indent="0" algn="l">
                         <a:buNone/>
                       </a:pPr>
                       <a:r>
@@ -5043,7 +5096,7 @@
                       <a:endParaRPr lang="en-US" sz="1200" dirty="0"/>
                     </a:p>
                   </a:txBody>
-                  <a:tcPr marL="91440" marR="91440" marT="45720" marB="45720" anchor="ctr">
+                  <a:tcPr anchor="ctr">
                     <a:lnL w="12700" cap="flat" cmpd="sng" algn="ctr">
                       <a:solidFill>
                         <a:srgbClr val="CCCCCC"/>
@@ -5090,7 +5143,7 @@
                     <a:bodyPr/>
                     <a:lstStyle/>
                     <a:p>
-                      <a:pPr algn="l" indent="0" marL="0">
+                      <a:pPr marL="0" indent="0" algn="l">
                         <a:buNone/>
                       </a:pPr>
                       <a:r>
@@ -5104,7 +5157,7 @@
                       <a:endParaRPr lang="en-US" sz="1200" dirty="0"/>
                     </a:p>
                   </a:txBody>
-                  <a:tcPr marL="91440" marR="91440" marT="45720" marB="45720" anchor="ctr">
+                  <a:tcPr anchor="ctr">
                     <a:lnL w="12700" cap="flat" cmpd="sng" algn="ctr">
                       <a:solidFill>
                         <a:srgbClr val="CCCCCC"/>
@@ -5146,6 +5199,11 @@
                     </a:solidFill>
                   </a:tcPr>
                 </a:tc>
+                <a:extLst>
+                  <a:ext uri="{0D108BD9-81ED-4DB2-BD59-A6C34878D82A}">
+                    <a16:rowId xmlns:a16="http://schemas.microsoft.com/office/drawing/2014/main" val="10008"/>
+                  </a:ext>
+                </a:extLst>
               </a:tr>
               <a:tr h="307571">
                 <a:tc>
@@ -5153,7 +5211,7 @@
                     <a:bodyPr/>
                     <a:lstStyle/>
                     <a:p>
-                      <a:pPr algn="l" indent="0" marL="0">
+                      <a:pPr marL="0" indent="0" algn="l">
                         <a:buNone/>
                       </a:pPr>
                       <a:r>
@@ -5167,7 +5225,7 @@
                       <a:endParaRPr lang="en-US" sz="1200" dirty="0"/>
                     </a:p>
                   </a:txBody>
-                  <a:tcPr marL="91440" marR="91440" marT="45720" marB="45720" anchor="ctr">
+                  <a:tcPr anchor="ctr">
                     <a:lnL w="12700" cap="flat" cmpd="sng" algn="ctr">
                       <a:solidFill>
                         <a:srgbClr val="CCCCCC"/>
@@ -5214,7 +5272,7 @@
                     <a:bodyPr/>
                     <a:lstStyle/>
                     <a:p>
-                      <a:pPr algn="l" indent="0" marL="0">
+                      <a:pPr marL="0" indent="0" algn="l">
                         <a:buNone/>
                       </a:pPr>
                       <a:r>
@@ -5228,7 +5286,7 @@
                       <a:endParaRPr lang="en-US" sz="1200" dirty="0"/>
                     </a:p>
                   </a:txBody>
-                  <a:tcPr marL="91440" marR="91440" marT="45720" marB="45720" anchor="ctr">
+                  <a:tcPr anchor="ctr">
                     <a:lnL w="12700" cap="flat" cmpd="sng" algn="ctr">
                       <a:solidFill>
                         <a:srgbClr val="CCCCCC"/>
@@ -5275,7 +5333,7 @@
                     <a:bodyPr/>
                     <a:lstStyle/>
                     <a:p>
-                      <a:pPr algn="l" indent="0" marL="0">
+                      <a:pPr marL="0" indent="0" algn="l">
                         <a:buNone/>
                       </a:pPr>
                       <a:r>
@@ -5289,7 +5347,7 @@
                       <a:endParaRPr lang="en-US" sz="1200" dirty="0"/>
                     </a:p>
                   </a:txBody>
-                  <a:tcPr marL="91440" marR="91440" marT="45720" marB="45720" anchor="ctr">
+                  <a:tcPr anchor="ctr">
                     <a:lnL w="12700" cap="flat" cmpd="sng" algn="ctr">
                       <a:solidFill>
                         <a:srgbClr val="CCCCCC"/>
@@ -5331,6 +5389,11 @@
                     </a:solidFill>
                   </a:tcPr>
                 </a:tc>
+                <a:extLst>
+                  <a:ext uri="{0D108BD9-81ED-4DB2-BD59-A6C34878D82A}">
+                    <a16:rowId xmlns:a16="http://schemas.microsoft.com/office/drawing/2014/main" val="10009"/>
+                  </a:ext>
+                </a:extLst>
               </a:tr>
               <a:tr h="307571">
                 <a:tc>
@@ -5338,7 +5401,7 @@
                     <a:bodyPr/>
                     <a:lstStyle/>
                     <a:p>
-                      <a:pPr algn="l" indent="0" marL="0">
+                      <a:pPr marL="0" indent="0" algn="l">
                         <a:buNone/>
                       </a:pPr>
                       <a:r>
@@ -5352,7 +5415,7 @@
                       <a:endParaRPr lang="en-US" sz="1200" dirty="0"/>
                     </a:p>
                   </a:txBody>
-                  <a:tcPr marL="91440" marR="91440" marT="45720" marB="45720" anchor="ctr">
+                  <a:tcPr anchor="ctr">
                     <a:lnL w="12700" cap="flat" cmpd="sng" algn="ctr">
                       <a:solidFill>
                         <a:srgbClr val="CCCCCC"/>
@@ -5399,7 +5462,7 @@
                     <a:bodyPr/>
                     <a:lstStyle/>
                     <a:p>
-                      <a:pPr algn="l" indent="0" marL="0">
+                      <a:pPr marL="0" indent="0" algn="l">
                         <a:buNone/>
                       </a:pPr>
                       <a:r>
@@ -5413,7 +5476,7 @@
                       <a:endParaRPr lang="en-US" sz="1200" dirty="0"/>
                     </a:p>
                   </a:txBody>
-                  <a:tcPr marL="91440" marR="91440" marT="45720" marB="45720" anchor="ctr">
+                  <a:tcPr anchor="ctr">
                     <a:lnL w="12700" cap="flat" cmpd="sng" algn="ctr">
                       <a:solidFill>
                         <a:srgbClr val="CCCCCC"/>
@@ -5460,7 +5523,7 @@
                     <a:bodyPr/>
                     <a:lstStyle/>
                     <a:p>
-                      <a:pPr algn="l" indent="0" marL="0">
+                      <a:pPr marL="0" indent="0" algn="l">
                         <a:buNone/>
                       </a:pPr>
                       <a:r>
@@ -5474,7 +5537,7 @@
                       <a:endParaRPr lang="en-US" sz="1200" dirty="0"/>
                     </a:p>
                   </a:txBody>
-                  <a:tcPr marL="91440" marR="91440" marT="45720" marB="45720" anchor="ctr">
+                  <a:tcPr anchor="ctr">
                     <a:lnL w="12700" cap="flat" cmpd="sng" algn="ctr">
                       <a:solidFill>
                         <a:srgbClr val="CCCCCC"/>
@@ -5516,6 +5579,11 @@
                     </a:solidFill>
                   </a:tcPr>
                 </a:tc>
+                <a:extLst>
+                  <a:ext uri="{0D108BD9-81ED-4DB2-BD59-A6C34878D82A}">
+                    <a16:rowId xmlns:a16="http://schemas.microsoft.com/office/drawing/2014/main" val="10010"/>
+                  </a:ext>
+                </a:extLst>
               </a:tr>
             </a:tbl>
           </a:graphicData>
@@ -5537,6 +5605,7 @@
         <a:solidFill>
           <a:srgbClr val="FFFFFF"/>
         </a:solidFill>
+        <a:effectLst/>
       </p:bgPr>
     </p:bg>
     <p:spTree>
@@ -5574,7 +5643,7 @@
           <a:bodyPr wrap="square" rtlCol="0" anchor="ctr"/>
           <a:lstStyle/>
           <a:p>
-            <a:pPr indent="0" marL="0">
+            <a:pPr marL="0" indent="0">
               <a:buNone/>
             </a:pPr>
             <a:r>
@@ -5613,6 +5682,13 @@
             <a:prstDash val="solid"/>
           </a:ln>
         </p:spPr>
+        <p:txBody>
+          <a:bodyPr/>
+          <a:lstStyle/>
+          <a:p>
+            <a:endParaRPr lang="es-419"/>
+          </a:p>
+        </p:txBody>
       </p:sp>
       <p:sp>
         <p:nvSpPr>
@@ -5635,7 +5711,7 @@
           <a:bodyPr wrap="square" rtlCol="0" anchor="ctr"/>
           <a:lstStyle/>
           <a:p>
-            <a:pPr indent="0" marL="0">
+            <a:pPr marL="0" indent="0">
               <a:buNone/>
             </a:pPr>
             <a:r>
@@ -5671,7 +5747,7 @@
           <a:bodyPr wrap="square" rtlCol="0" anchor="ctr"/>
           <a:lstStyle/>
           <a:p>
-            <a:pPr indent="0" marL="0">
+            <a:pPr marL="0" indent="0">
               <a:buNone/>
             </a:pPr>
             <a:r>
@@ -5710,7 +5786,7 @@
           <a:bodyPr wrap="square" rtlCol="0" anchor="ctr"/>
           <a:lstStyle/>
           <a:p>
-            <a:pPr indent="0" marL="0">
+            <a:pPr marL="0" indent="0">
               <a:buNone/>
             </a:pPr>
             <a:r>
@@ -5746,7 +5822,7 @@
           <a:bodyPr wrap="square" rtlCol="0" anchor="ctr"/>
           <a:lstStyle/>
           <a:p>
-            <a:pPr indent="0" marL="0">
+            <a:pPr marL="0" indent="0">
               <a:buNone/>
             </a:pPr>
             <a:r>
@@ -5763,7 +5839,7 @@
             <a:endParaRPr lang="en-US" sz="1400" dirty="0"/>
           </a:p>
           <a:p>
-            <a:pPr indent="0" marL="0">
+            <a:pPr marL="0" indent="0">
               <a:buNone/>
             </a:pPr>
             <a:r>
@@ -5780,7 +5856,7 @@
             <a:endParaRPr lang="en-US" sz="1400" dirty="0"/>
           </a:p>
           <a:p>
-            <a:pPr indent="0" marL="0">
+            <a:pPr marL="0" indent="0">
               <a:buNone/>
             </a:pPr>
             <a:r>
@@ -5797,7 +5873,7 @@
             <a:endParaRPr lang="en-US" sz="1400" dirty="0"/>
           </a:p>
           <a:p>
-            <a:pPr indent="0" marL="0">
+            <a:pPr marL="0" indent="0">
               <a:buNone/>
             </a:pPr>
             <a:r>
@@ -5831,6 +5907,7 @@
         <a:solidFill>
           <a:srgbClr val="1C2833"/>
         </a:solidFill>
+        <a:effectLst/>
       </p:bgPr>
     </p:bg>
     <p:spTree>
@@ -5868,7 +5945,7 @@
           <a:bodyPr wrap="square" rtlCol="0" anchor="ctr"/>
           <a:lstStyle/>
           <a:p>
-            <a:pPr algn="ctr" indent="0" marL="0">
+            <a:pPr marL="0" indent="0" algn="ctr">
               <a:buNone/>
             </a:pPr>
             <a:r>
@@ -5907,6 +5984,13 @@
             <a:prstDash val="solid"/>
           </a:ln>
         </p:spPr>
+        <p:txBody>
+          <a:bodyPr/>
+          <a:lstStyle/>
+          <a:p>
+            <a:endParaRPr lang="es-419"/>
+          </a:p>
+        </p:txBody>
       </p:sp>
       <p:sp>
         <p:nvSpPr>
@@ -5929,7 +6013,7 @@
           <a:bodyPr wrap="square" rtlCol="0" anchor="ctr"/>
           <a:lstStyle/>
           <a:p>
-            <a:pPr indent="0" marL="0">
+            <a:pPr marL="0" indent="0">
               <a:buNone/>
             </a:pPr>
             <a:r>
@@ -5965,7 +6049,7 @@
           <a:bodyPr wrap="square" rtlCol="0" anchor="ctr"/>
           <a:lstStyle/>
           <a:p>
-            <a:pPr indent="0" marL="0">
+            <a:pPr marL="0" indent="0">
               <a:buNone/>
             </a:pPr>
             <a:r>
@@ -5979,7 +6063,7 @@
             <a:endParaRPr lang="en-US" sz="1400" dirty="0"/>
           </a:p>
           <a:p>
-            <a:pPr indent="0" marL="0">
+            <a:pPr marL="0" indent="0">
               <a:buNone/>
             </a:pPr>
             <a:r>
@@ -6018,6 +6102,13 @@
             <a:prstDash val="solid"/>
           </a:ln>
         </p:spPr>
+        <p:txBody>
+          <a:bodyPr/>
+          <a:lstStyle/>
+          <a:p>
+            <a:endParaRPr lang="es-419"/>
+          </a:p>
+        </p:txBody>
       </p:sp>
       <p:sp>
         <p:nvSpPr>
@@ -6040,7 +6131,7 @@
           <a:bodyPr wrap="square" rtlCol="0" anchor="ctr"/>
           <a:lstStyle/>
           <a:p>
-            <a:pPr indent="0" marL="0">
+            <a:pPr marL="0" indent="0">
               <a:buNone/>
             </a:pPr>
             <a:r>
@@ -6076,7 +6167,7 @@
           <a:bodyPr wrap="square" rtlCol="0" anchor="ctr"/>
           <a:lstStyle/>
           <a:p>
-            <a:pPr indent="0" marL="0">
+            <a:pPr marL="0" indent="0">
               <a:buNone/>
             </a:pPr>
             <a:r>
@@ -6090,7 +6181,7 @@
             <a:endParaRPr lang="en-US" sz="1400" dirty="0"/>
           </a:p>
           <a:p>
-            <a:pPr indent="0" marL="0">
+            <a:pPr marL="0" indent="0">
               <a:buNone/>
             </a:pPr>
             <a:r>
@@ -6129,6 +6220,13 @@
             <a:prstDash val="solid"/>
           </a:ln>
         </p:spPr>
+        <p:txBody>
+          <a:bodyPr/>
+          <a:lstStyle/>
+          <a:p>
+            <a:endParaRPr lang="es-419"/>
+          </a:p>
+        </p:txBody>
       </p:sp>
       <p:sp>
         <p:nvSpPr>
@@ -6151,7 +6249,7 @@
           <a:bodyPr wrap="square" rtlCol="0" anchor="ctr"/>
           <a:lstStyle/>
           <a:p>
-            <a:pPr indent="0" marL="0">
+            <a:pPr marL="0" indent="0">
               <a:buNone/>
             </a:pPr>
             <a:r>
@@ -6187,7 +6285,7 @@
           <a:bodyPr wrap="square" rtlCol="0" anchor="ctr"/>
           <a:lstStyle/>
           <a:p>
-            <a:pPr indent="0" marL="0">
+            <a:pPr marL="0" indent="0">
               <a:buNone/>
             </a:pPr>
             <a:r>
@@ -6201,7 +6299,7 @@
             <a:endParaRPr lang="en-US" sz="1400" dirty="0"/>
           </a:p>
           <a:p>
-            <a:pPr indent="0" marL="0">
+            <a:pPr marL="0" indent="0">
               <a:buNone/>
             </a:pPr>
             <a:r>
@@ -6240,6 +6338,13 @@
             <a:prstDash val="solid"/>
           </a:ln>
         </p:spPr>
+        <p:txBody>
+          <a:bodyPr/>
+          <a:lstStyle/>
+          <a:p>
+            <a:endParaRPr lang="es-419"/>
+          </a:p>
+        </p:txBody>
       </p:sp>
       <p:sp>
         <p:nvSpPr>
@@ -6262,7 +6367,7 @@
           <a:bodyPr wrap="square" rtlCol="0" anchor="ctr"/>
           <a:lstStyle/>
           <a:p>
-            <a:pPr indent="0" marL="0">
+            <a:pPr marL="0" indent="0">
               <a:buNone/>
             </a:pPr>
             <a:r>
@@ -6298,7 +6403,7 @@
           <a:bodyPr wrap="square" rtlCol="0" anchor="ctr"/>
           <a:lstStyle/>
           <a:p>
-            <a:pPr indent="0" marL="0">
+            <a:pPr marL="0" indent="0">
               <a:buNone/>
             </a:pPr>
             <a:r>
@@ -6312,7 +6417,7 @@
             <a:endParaRPr lang="en-US" sz="1400" dirty="0"/>
           </a:p>
           <a:p>
-            <a:pPr indent="0" marL="0">
+            <a:pPr marL="0" indent="0">
               <a:buNone/>
             </a:pPr>
             <a:r>
@@ -6343,6 +6448,7 @@
         <a:solidFill>
           <a:srgbClr val="FFFFFF"/>
         </a:solidFill>
+        <a:effectLst/>
       </p:bgPr>
     </p:bg>
     <p:spTree>
@@ -6380,7 +6486,7 @@
           <a:bodyPr wrap="square" rtlCol="0" anchor="ctr"/>
           <a:lstStyle/>
           <a:p>
-            <a:pPr indent="0" marL="0">
+            <a:pPr marL="0" indent="0">
               <a:buNone/>
             </a:pPr>
             <a:r>
@@ -6416,7 +6522,7 @@
           <a:bodyPr wrap="square" rtlCol="0" anchor="ctr"/>
           <a:lstStyle/>
           <a:p>
-            <a:pPr indent="0" marL="0">
+            <a:pPr marL="0" indent="0">
               <a:buNone/>
             </a:pPr>
             <a:r>
@@ -6452,7 +6558,7 @@
           <a:bodyPr wrap="square" rtlCol="0" anchor="ctr"/>
           <a:lstStyle/>
           <a:p>
-            <a:pPr indent="0" marL="0">
+            <a:pPr marL="0" indent="0">
               <a:buNone/>
             </a:pPr>
             <a:r>
@@ -6466,7 +6572,7 @@
             <a:endParaRPr lang="en-US" sz="1600" dirty="0"/>
           </a:p>
           <a:p>
-            <a:pPr indent="0" marL="0">
+            <a:pPr marL="0" indent="0">
               <a:buNone/>
             </a:pPr>
             <a:r>
@@ -6480,7 +6586,7 @@
             <a:endParaRPr lang="en-US" sz="1600" dirty="0"/>
           </a:p>
           <a:p>
-            <a:pPr indent="0" marL="0">
+            <a:pPr marL="0" indent="0">
               <a:buNone/>
             </a:pPr>
             <a:r>
@@ -6516,7 +6622,7 @@
           <a:bodyPr wrap="square" rtlCol="0" anchor="ctr"/>
           <a:lstStyle/>
           <a:p>
-            <a:pPr indent="0" marL="0">
+            <a:pPr marL="0" indent="0">
               <a:buNone/>
             </a:pPr>
             <a:r>
@@ -6552,7 +6658,7 @@
           <a:bodyPr wrap="square" rtlCol="0" anchor="ctr"/>
           <a:lstStyle/>
           <a:p>
-            <a:pPr indent="0" marL="0">
+            <a:pPr marL="0" indent="0">
               <a:buNone/>
             </a:pPr>
             <a:r>
@@ -6566,7 +6672,7 @@
             <a:endParaRPr lang="en-US" sz="1600" dirty="0"/>
           </a:p>
           <a:p>
-            <a:pPr indent="0" marL="0">
+            <a:pPr marL="0" indent="0">
               <a:buNone/>
             </a:pPr>
             <a:r>
@@ -6580,7 +6686,7 @@
             <a:endParaRPr lang="en-US" sz="1600" dirty="0"/>
           </a:p>
           <a:p>
-            <a:pPr indent="0" marL="0">
+            <a:pPr marL="0" indent="0">
               <a:buNone/>
             </a:pPr>
             <a:r>
@@ -6616,7 +6722,7 @@
           <a:bodyPr wrap="square" rtlCol="0" anchor="ctr"/>
           <a:lstStyle/>
           <a:p>
-            <a:pPr indent="0" marL="0">
+            <a:pPr marL="0" indent="0">
               <a:buNone/>
             </a:pPr>
             <a:r>
@@ -6652,7 +6758,7 @@
           <a:bodyPr wrap="square" rtlCol="0" anchor="ctr"/>
           <a:lstStyle/>
           <a:p>
-            <a:pPr indent="0" marL="0">
+            <a:pPr marL="0" indent="0">
               <a:buNone/>
             </a:pPr>
             <a:r>
@@ -6666,7 +6772,7 @@
             <a:endParaRPr lang="en-US" sz="1600" dirty="0"/>
           </a:p>
           <a:p>
-            <a:pPr indent="0" marL="0">
+            <a:pPr marL="0" indent="0">
               <a:buNone/>
             </a:pPr>
             <a:r>
@@ -6702,7 +6808,7 @@
           <a:bodyPr wrap="square" rtlCol="0" anchor="ctr"/>
           <a:lstStyle/>
           <a:p>
-            <a:pPr indent="0" marL="0">
+            <a:pPr marL="0" indent="0">
               <a:buNone/>
             </a:pPr>
             <a:r>
@@ -6738,7 +6844,7 @@
           <a:bodyPr wrap="square" rtlCol="0" anchor="ctr"/>
           <a:lstStyle/>
           <a:p>
-            <a:pPr indent="0" marL="0">
+            <a:pPr marL="0" indent="0">
               <a:buNone/>
             </a:pPr>
             <a:r>
@@ -6752,7 +6858,7 @@
             <a:endParaRPr lang="en-US" sz="1600" dirty="0"/>
           </a:p>
           <a:p>
-            <a:pPr indent="0" marL="0">
+            <a:pPr marL="0" indent="0">
               <a:buNone/>
             </a:pPr>
             <a:r>
@@ -6783,6 +6889,7 @@
         <a:solidFill>
           <a:srgbClr val="FFFFFF"/>
         </a:solidFill>
+        <a:effectLst/>
       </p:bgPr>
     </p:bg>
     <p:spTree>
@@ -6820,7 +6927,7 @@
           <a:bodyPr wrap="square" rtlCol="0" anchor="ctr"/>
           <a:lstStyle/>
           <a:p>
-            <a:pPr indent="0" marL="0">
+            <a:pPr marL="0" indent="0">
               <a:buNone/>
             </a:pPr>
             <a:r>
@@ -6859,6 +6966,13 @@
             <a:prstDash val="solid"/>
           </a:ln>
         </p:spPr>
+        <p:txBody>
+          <a:bodyPr/>
+          <a:lstStyle/>
+          <a:p>
+            <a:endParaRPr lang="es-419"/>
+          </a:p>
+        </p:txBody>
       </p:sp>
       <p:sp>
         <p:nvSpPr>
@@ -6881,7 +6995,7 @@
           <a:bodyPr wrap="square" rtlCol="0" anchor="ctr"/>
           <a:lstStyle/>
           <a:p>
-            <a:pPr indent="0" marL="0">
+            <a:pPr marL="0" indent="0">
               <a:buNone/>
             </a:pPr>
             <a:r>
@@ -6917,7 +7031,7 @@
           <a:bodyPr wrap="square" rtlCol="0" anchor="ctr"/>
           <a:lstStyle/>
           <a:p>
-            <a:pPr indent="0" marL="0">
+            <a:pPr marL="0" indent="0">
               <a:buNone/>
             </a:pPr>
             <a:r>
@@ -6953,7 +7067,7 @@
           <a:bodyPr wrap="square" rtlCol="0" anchor="ctr"/>
           <a:lstStyle/>
           <a:p>
-            <a:pPr indent="0" marL="0">
+            <a:pPr marL="0" indent="0">
               <a:buNone/>
             </a:pPr>
             <a:r>
@@ -6989,7 +7103,7 @@
           <a:bodyPr wrap="square" rtlCol="0" anchor="ctr"/>
           <a:lstStyle/>
           <a:p>
-            <a:pPr indent="0" marL="0">
+            <a:pPr marL="0" indent="0">
               <a:buNone/>
             </a:pPr>
             <a:r>
@@ -7025,7 +7139,7 @@
           <a:bodyPr wrap="square" rtlCol="0" anchor="ctr"/>
           <a:lstStyle/>
           <a:p>
-            <a:pPr indent="0" marL="0">
+            <a:pPr marL="0" indent="0">
               <a:buNone/>
             </a:pPr>
             <a:r>
@@ -7061,7 +7175,7 @@
           <a:bodyPr wrap="square" rtlCol="0" anchor="ctr"/>
           <a:lstStyle/>
           <a:p>
-            <a:pPr indent="0" marL="0">
+            <a:pPr marL="0" indent="0">
               <a:buNone/>
             </a:pPr>
             <a:r>
@@ -7078,7 +7192,7 @@
             <a:endParaRPr lang="en-US" sz="1400" dirty="0"/>
           </a:p>
           <a:p>
-            <a:pPr indent="0" marL="0">
+            <a:pPr marL="0" indent="0">
               <a:buNone/>
             </a:pPr>
             <a:r>
@@ -7095,7 +7209,7 @@
             <a:endParaRPr lang="en-US" sz="1400" dirty="0"/>
           </a:p>
           <a:p>
-            <a:pPr indent="0" marL="0">
+            <a:pPr marL="0" indent="0">
               <a:buNone/>
             </a:pPr>
             <a:r>
@@ -7112,7 +7226,7 @@
             <a:endParaRPr lang="en-US" sz="1400" dirty="0"/>
           </a:p>
           <a:p>
-            <a:pPr indent="0" marL="0">
+            <a:pPr marL="0" indent="0">
               <a:buNone/>
             </a:pPr>
             <a:r>
@@ -7146,6 +7260,7 @@
         <a:solidFill>
           <a:srgbClr val="FFFFFF"/>
         </a:solidFill>
+        <a:effectLst/>
       </p:bgPr>
     </p:bg>
     <p:spTree>
@@ -7183,7 +7298,7 @@
           <a:bodyPr wrap="square" rtlCol="0" anchor="ctr"/>
           <a:lstStyle/>
           <a:p>
-            <a:pPr indent="0" marL="0">
+            <a:pPr marL="0" indent="0">
               <a:buNone/>
             </a:pPr>
             <a:r>
@@ -7222,6 +7337,13 @@
             <a:prstDash val="solid"/>
           </a:ln>
         </p:spPr>
+        <p:txBody>
+          <a:bodyPr/>
+          <a:lstStyle/>
+          <a:p>
+            <a:endParaRPr lang="es-419"/>
+          </a:p>
+        </p:txBody>
       </p:sp>
       <p:sp>
         <p:nvSpPr>
@@ -7244,7 +7366,7 @@
           <a:bodyPr wrap="square" rtlCol="0" anchor="ctr"/>
           <a:lstStyle/>
           <a:p>
-            <a:pPr indent="0" marL="0">
+            <a:pPr marL="0" indent="0">
               <a:buNone/>
             </a:pPr>
             <a:r>
@@ -7280,7 +7402,7 @@
           <a:bodyPr wrap="square" rtlCol="0" anchor="ctr"/>
           <a:lstStyle/>
           <a:p>
-            <a:pPr indent="0" marL="0">
+            <a:pPr marL="0" indent="0">
               <a:buNone/>
             </a:pPr>
             <a:r>
@@ -7316,7 +7438,7 @@
           <a:bodyPr wrap="square" rtlCol="0" anchor="ctr"/>
           <a:lstStyle/>
           <a:p>
-            <a:pPr indent="0" marL="0">
+            <a:pPr marL="0" indent="0">
               <a:buNone/>
             </a:pPr>
             <a:r>
@@ -7352,7 +7474,7 @@
           <a:bodyPr wrap="square" rtlCol="0" anchor="ctr"/>
           <a:lstStyle/>
           <a:p>
-            <a:pPr indent="0" marL="0">
+            <a:pPr marL="0" indent="0">
               <a:buNone/>
             </a:pPr>
             <a:r>
@@ -7388,7 +7510,7 @@
           <a:bodyPr wrap="square" rtlCol="0" anchor="ctr"/>
           <a:lstStyle/>
           <a:p>
-            <a:pPr indent="0" marL="0">
+            <a:pPr marL="0" indent="0">
               <a:buNone/>
             </a:pPr>
             <a:r>
@@ -7424,7 +7546,7 @@
           <a:bodyPr wrap="square" rtlCol="0" anchor="ctr"/>
           <a:lstStyle/>
           <a:p>
-            <a:pPr indent="0" marL="0">
+            <a:pPr marL="0" indent="0">
               <a:buNone/>
             </a:pPr>
             <a:r>
@@ -7441,7 +7563,7 @@
             <a:endParaRPr lang="en-US" sz="1400" dirty="0"/>
           </a:p>
           <a:p>
-            <a:pPr indent="0" marL="0">
+            <a:pPr marL="0" indent="0">
               <a:buNone/>
             </a:pPr>
             <a:r>
@@ -7458,7 +7580,7 @@
             <a:endParaRPr lang="en-US" sz="1400" dirty="0"/>
           </a:p>
           <a:p>
-            <a:pPr indent="0" marL="0">
+            <a:pPr marL="0" indent="0">
               <a:buNone/>
             </a:pPr>
             <a:r>
@@ -7475,7 +7597,7 @@
             <a:endParaRPr lang="en-US" sz="1400" dirty="0"/>
           </a:p>
           <a:p>
-            <a:pPr indent="0" marL="0">
+            <a:pPr marL="0" indent="0">
               <a:buNone/>
             </a:pPr>
             <a:r>
@@ -7509,6 +7631,7 @@
         <a:solidFill>
           <a:srgbClr val="FFFFFF"/>
         </a:solidFill>
+        <a:effectLst/>
       </p:bgPr>
     </p:bg>
     <p:spTree>
@@ -7546,7 +7669,7 @@
           <a:bodyPr wrap="square" rtlCol="0" anchor="ctr"/>
           <a:lstStyle/>
           <a:p>
-            <a:pPr indent="0" marL="0">
+            <a:pPr marL="0" indent="0">
               <a:buNone/>
             </a:pPr>
             <a:r>
@@ -7585,6 +7708,13 @@
             <a:prstDash val="solid"/>
           </a:ln>
         </p:spPr>
+        <p:txBody>
+          <a:bodyPr/>
+          <a:lstStyle/>
+          <a:p>
+            <a:endParaRPr lang="es-419"/>
+          </a:p>
+        </p:txBody>
       </p:sp>
       <p:sp>
         <p:nvSpPr>
@@ -7607,7 +7737,7 @@
           <a:bodyPr wrap="square" rtlCol="0" anchor="ctr"/>
           <a:lstStyle/>
           <a:p>
-            <a:pPr indent="0" marL="0">
+            <a:pPr marL="0" indent="0">
               <a:buNone/>
             </a:pPr>
             <a:r>
@@ -7643,7 +7773,7 @@
           <a:bodyPr wrap="square" rtlCol="0" anchor="ctr"/>
           <a:lstStyle/>
           <a:p>
-            <a:pPr indent="0" marL="0">
+            <a:pPr marL="0" indent="0">
               <a:buNone/>
             </a:pPr>
             <a:r>
@@ -7679,7 +7809,7 @@
           <a:bodyPr wrap="square" rtlCol="0" anchor="ctr"/>
           <a:lstStyle/>
           <a:p>
-            <a:pPr indent="0" marL="0">
+            <a:pPr marL="0" indent="0">
               <a:buNone/>
             </a:pPr>
             <a:r>
@@ -7715,7 +7845,7 @@
           <a:bodyPr wrap="square" rtlCol="0" anchor="ctr"/>
           <a:lstStyle/>
           <a:p>
-            <a:pPr indent="0" marL="0">
+            <a:pPr marL="0" indent="0">
               <a:buNone/>
             </a:pPr>
             <a:r>
@@ -7751,7 +7881,7 @@
           <a:bodyPr wrap="square" rtlCol="0" anchor="ctr"/>
           <a:lstStyle/>
           <a:p>
-            <a:pPr indent="0" marL="0">
+            <a:pPr marL="0" indent="0">
               <a:buNone/>
             </a:pPr>
             <a:r>
@@ -7787,7 +7917,7 @@
           <a:bodyPr wrap="square" rtlCol="0" anchor="ctr"/>
           <a:lstStyle/>
           <a:p>
-            <a:pPr indent="0" marL="0">
+            <a:pPr marL="0" indent="0">
               <a:buNone/>
             </a:pPr>
             <a:r>
@@ -7804,7 +7934,7 @@
             <a:endParaRPr lang="en-US" sz="1400" dirty="0"/>
           </a:p>
           <a:p>
-            <a:pPr indent="0" marL="0">
+            <a:pPr marL="0" indent="0">
               <a:buNone/>
             </a:pPr>
             <a:r>
@@ -7821,7 +7951,7 @@
             <a:endParaRPr lang="en-US" sz="1400" dirty="0"/>
           </a:p>
           <a:p>
-            <a:pPr indent="0" marL="0">
+            <a:pPr marL="0" indent="0">
               <a:buNone/>
             </a:pPr>
             <a:r>
@@ -7838,7 +7968,7 @@
             <a:endParaRPr lang="en-US" sz="1400" dirty="0"/>
           </a:p>
           <a:p>
-            <a:pPr indent="0" marL="0">
+            <a:pPr marL="0" indent="0">
               <a:buNone/>
             </a:pPr>
             <a:r>
@@ -7872,6 +8002,7 @@
         <a:solidFill>
           <a:srgbClr val="FFFFFF"/>
         </a:solidFill>
+        <a:effectLst/>
       </p:bgPr>
     </p:bg>
     <p:spTree>
@@ -7909,7 +8040,7 @@
           <a:bodyPr wrap="square" rtlCol="0" anchor="ctr"/>
           <a:lstStyle/>
           <a:p>
-            <a:pPr indent="0" marL="0">
+            <a:pPr marL="0" indent="0">
               <a:buNone/>
             </a:pPr>
             <a:r>
@@ -7948,6 +8079,13 @@
             <a:prstDash val="solid"/>
           </a:ln>
         </p:spPr>
+        <p:txBody>
+          <a:bodyPr/>
+          <a:lstStyle/>
+          <a:p>
+            <a:endParaRPr lang="es-419"/>
+          </a:p>
+        </p:txBody>
       </p:sp>
       <p:sp>
         <p:nvSpPr>
@@ -7970,7 +8108,7 @@
           <a:bodyPr wrap="square" rtlCol="0" anchor="ctr"/>
           <a:lstStyle/>
           <a:p>
-            <a:pPr indent="0" marL="0">
+            <a:pPr marL="0" indent="0">
               <a:buNone/>
             </a:pPr>
             <a:r>
@@ -8006,7 +8144,7 @@
           <a:bodyPr wrap="square" rtlCol="0" anchor="ctr"/>
           <a:lstStyle/>
           <a:p>
-            <a:pPr indent="0" marL="0">
+            <a:pPr marL="0" indent="0">
               <a:buNone/>
             </a:pPr>
             <a:r>
@@ -8042,7 +8180,7 @@
           <a:bodyPr wrap="square" rtlCol="0" anchor="ctr"/>
           <a:lstStyle/>
           <a:p>
-            <a:pPr indent="0" marL="0">
+            <a:pPr marL="0" indent="0">
               <a:buNone/>
             </a:pPr>
             <a:r>
@@ -8078,7 +8216,7 @@
           <a:bodyPr wrap="square" rtlCol="0" anchor="ctr"/>
           <a:lstStyle/>
           <a:p>
-            <a:pPr indent="0" marL="0">
+            <a:pPr marL="0" indent="0">
               <a:buNone/>
             </a:pPr>
             <a:r>
@@ -8114,7 +8252,7 @@
           <a:bodyPr wrap="square" rtlCol="0" anchor="ctr"/>
           <a:lstStyle/>
           <a:p>
-            <a:pPr indent="0" marL="0">
+            <a:pPr marL="0" indent="0">
               <a:buNone/>
             </a:pPr>
             <a:r>
@@ -8150,7 +8288,7 @@
           <a:bodyPr wrap="square" rtlCol="0" anchor="ctr"/>
           <a:lstStyle/>
           <a:p>
-            <a:pPr indent="0" marL="0">
+            <a:pPr marL="0" indent="0">
               <a:buNone/>
             </a:pPr>
             <a:r>
@@ -8167,7 +8305,7 @@
             <a:endParaRPr lang="en-US" sz="1400" dirty="0"/>
           </a:p>
           <a:p>
-            <a:pPr indent="0" marL="0">
+            <a:pPr marL="0" indent="0">
               <a:buNone/>
             </a:pPr>
             <a:r>
@@ -8184,7 +8322,7 @@
             <a:endParaRPr lang="en-US" sz="1400" dirty="0"/>
           </a:p>
           <a:p>
-            <a:pPr indent="0" marL="0">
+            <a:pPr marL="0" indent="0">
               <a:buNone/>
             </a:pPr>
             <a:r>
@@ -8201,7 +8339,7 @@
             <a:endParaRPr lang="en-US" sz="1400" dirty="0"/>
           </a:p>
           <a:p>
-            <a:pPr indent="0" marL="0">
+            <a:pPr marL="0" indent="0">
               <a:buNone/>
             </a:pPr>
             <a:r>
@@ -8235,6 +8373,7 @@
         <a:solidFill>
           <a:srgbClr val="FFFFFF"/>
         </a:solidFill>
+        <a:effectLst/>
       </p:bgPr>
     </p:bg>
     <p:spTree>
@@ -8272,7 +8411,7 @@
           <a:bodyPr wrap="square" rtlCol="0" anchor="ctr"/>
           <a:lstStyle/>
           <a:p>
-            <a:pPr indent="0" marL="0">
+            <a:pPr marL="0" indent="0">
               <a:buNone/>
             </a:pPr>
             <a:r>
@@ -8311,6 +8450,13 @@
             <a:prstDash val="solid"/>
           </a:ln>
         </p:spPr>
+        <p:txBody>
+          <a:bodyPr/>
+          <a:lstStyle/>
+          <a:p>
+            <a:endParaRPr lang="es-419"/>
+          </a:p>
+        </p:txBody>
       </p:sp>
       <p:sp>
         <p:nvSpPr>
@@ -8333,7 +8479,7 @@
           <a:bodyPr wrap="square" rtlCol="0" anchor="ctr"/>
           <a:lstStyle/>
           <a:p>
-            <a:pPr indent="0" marL="0">
+            <a:pPr marL="0" indent="0">
               <a:buNone/>
             </a:pPr>
             <a:r>
@@ -8369,7 +8515,7 @@
           <a:bodyPr wrap="square" rtlCol="0" anchor="ctr"/>
           <a:lstStyle/>
           <a:p>
-            <a:pPr indent="0" marL="0">
+            <a:pPr marL="0" indent="0">
               <a:buNone/>
             </a:pPr>
             <a:r>
@@ -8405,7 +8551,7 @@
           <a:bodyPr wrap="square" rtlCol="0" anchor="ctr"/>
           <a:lstStyle/>
           <a:p>
-            <a:pPr indent="0" marL="0">
+            <a:pPr marL="0" indent="0">
               <a:buNone/>
             </a:pPr>
             <a:r>
@@ -8441,7 +8587,7 @@
           <a:bodyPr wrap="square" rtlCol="0" anchor="ctr"/>
           <a:lstStyle/>
           <a:p>
-            <a:pPr indent="0" marL="0">
+            <a:pPr marL="0" indent="0">
               <a:buNone/>
             </a:pPr>
             <a:r>
@@ -8477,7 +8623,7 @@
           <a:bodyPr wrap="square" rtlCol="0" anchor="ctr"/>
           <a:lstStyle/>
           <a:p>
-            <a:pPr indent="0" marL="0">
+            <a:pPr marL="0" indent="0">
               <a:buNone/>
             </a:pPr>
             <a:r>
@@ -8513,7 +8659,7 @@
           <a:bodyPr wrap="square" rtlCol="0" anchor="ctr"/>
           <a:lstStyle/>
           <a:p>
-            <a:pPr indent="0" marL="0">
+            <a:pPr marL="0" indent="0">
               <a:buNone/>
             </a:pPr>
             <a:r>
@@ -8530,7 +8676,7 @@
             <a:endParaRPr lang="en-US" sz="1400" dirty="0"/>
           </a:p>
           <a:p>
-            <a:pPr indent="0" marL="0">
+            <a:pPr marL="0" indent="0">
               <a:buNone/>
             </a:pPr>
             <a:r>
@@ -8547,7 +8693,7 @@
             <a:endParaRPr lang="en-US" sz="1400" dirty="0"/>
           </a:p>
           <a:p>
-            <a:pPr indent="0" marL="0">
+            <a:pPr marL="0" indent="0">
               <a:buNone/>
             </a:pPr>
             <a:r>
@@ -8564,7 +8710,7 @@
             <a:endParaRPr lang="en-US" sz="1400" dirty="0"/>
           </a:p>
           <a:p>
-            <a:pPr indent="0" marL="0">
+            <a:pPr marL="0" indent="0">
               <a:buNone/>
             </a:pPr>
             <a:r>
@@ -8598,6 +8744,7 @@
         <a:solidFill>
           <a:srgbClr val="FFFFFF"/>
         </a:solidFill>
+        <a:effectLst/>
       </p:bgPr>
     </p:bg>
     <p:spTree>
@@ -8635,7 +8782,7 @@
           <a:bodyPr wrap="square" rtlCol="0" anchor="ctr"/>
           <a:lstStyle/>
           <a:p>
-            <a:pPr indent="0" marL="0">
+            <a:pPr marL="0" indent="0">
               <a:buNone/>
             </a:pPr>
             <a:r>
@@ -8674,6 +8821,13 @@
             <a:prstDash val="solid"/>
           </a:ln>
         </p:spPr>
+        <p:txBody>
+          <a:bodyPr/>
+          <a:lstStyle/>
+          <a:p>
+            <a:endParaRPr lang="es-419"/>
+          </a:p>
+        </p:txBody>
       </p:sp>
       <p:sp>
         <p:nvSpPr>
@@ -8696,7 +8850,7 @@
           <a:bodyPr wrap="square" rtlCol="0" anchor="ctr"/>
           <a:lstStyle/>
           <a:p>
-            <a:pPr indent="0" marL="0">
+            <a:pPr marL="0" indent="0">
               <a:buNone/>
             </a:pPr>
             <a:r>
@@ -8732,7 +8886,7 @@
           <a:bodyPr wrap="square" rtlCol="0" anchor="ctr"/>
           <a:lstStyle/>
           <a:p>
-            <a:pPr indent="0" marL="0">
+            <a:pPr marL="0" indent="0">
               <a:buNone/>
             </a:pPr>
             <a:r>
@@ -8768,7 +8922,7 @@
           <a:bodyPr wrap="square" rtlCol="0" anchor="ctr"/>
           <a:lstStyle/>
           <a:p>
-            <a:pPr indent="0" marL="0">
+            <a:pPr marL="0" indent="0">
               <a:buNone/>
             </a:pPr>
             <a:r>
@@ -8804,7 +8958,7 @@
           <a:bodyPr wrap="square" rtlCol="0" anchor="ctr"/>
           <a:lstStyle/>
           <a:p>
-            <a:pPr indent="0" marL="0">
+            <a:pPr marL="0" indent="0">
               <a:buNone/>
             </a:pPr>
             <a:r>
@@ -8840,7 +8994,7 @@
           <a:bodyPr wrap="square" rtlCol="0" anchor="ctr"/>
           <a:lstStyle/>
           <a:p>
-            <a:pPr indent="0" marL="0">
+            <a:pPr marL="0" indent="0">
               <a:buNone/>
             </a:pPr>
             <a:r>
@@ -8876,7 +9030,7 @@
           <a:bodyPr wrap="square" rtlCol="0" anchor="ctr"/>
           <a:lstStyle/>
           <a:p>
-            <a:pPr indent="0" marL="0">
+            <a:pPr marL="0" indent="0">
               <a:buNone/>
             </a:pPr>
             <a:r>
@@ -8893,7 +9047,7 @@
             <a:endParaRPr lang="en-US" sz="1400" dirty="0"/>
           </a:p>
           <a:p>
-            <a:pPr indent="0" marL="0">
+            <a:pPr marL="0" indent="0">
               <a:buNone/>
             </a:pPr>
             <a:r>
@@ -8910,7 +9064,7 @@
             <a:endParaRPr lang="en-US" sz="1400" dirty="0"/>
           </a:p>
           <a:p>
-            <a:pPr indent="0" marL="0">
+            <a:pPr marL="0" indent="0">
               <a:buNone/>
             </a:pPr>
             <a:r>
@@ -8927,7 +9081,7 @@
             <a:endParaRPr lang="en-US" sz="1400" dirty="0"/>
           </a:p>
           <a:p>
-            <a:pPr indent="0" marL="0">
+            <a:pPr marL="0" indent="0">
               <a:buNone/>
             </a:pPr>
             <a:r>
@@ -8961,6 +9115,7 @@
         <a:solidFill>
           <a:srgbClr val="FFFFFF"/>
         </a:solidFill>
+        <a:effectLst/>
       </p:bgPr>
     </p:bg>
     <p:spTree>
@@ -8998,7 +9153,7 @@
           <a:bodyPr wrap="square" rtlCol="0" anchor="ctr"/>
           <a:lstStyle/>
           <a:p>
-            <a:pPr indent="0" marL="0">
+            <a:pPr marL="0" indent="0">
               <a:buNone/>
             </a:pPr>
             <a:r>
@@ -9037,6 +9192,13 @@
             <a:prstDash val="solid"/>
           </a:ln>
         </p:spPr>
+        <p:txBody>
+          <a:bodyPr/>
+          <a:lstStyle/>
+          <a:p>
+            <a:endParaRPr lang="es-419"/>
+          </a:p>
+        </p:txBody>
       </p:sp>
       <p:sp>
         <p:nvSpPr>
@@ -9059,7 +9221,7 @@
           <a:bodyPr wrap="square" rtlCol="0" anchor="ctr"/>
           <a:lstStyle/>
           <a:p>
-            <a:pPr indent="0" marL="0">
+            <a:pPr marL="0" indent="0">
               <a:buNone/>
             </a:pPr>
             <a:r>
@@ -9095,7 +9257,7 @@
           <a:bodyPr wrap="square" rtlCol="0" anchor="ctr"/>
           <a:lstStyle/>
           <a:p>
-            <a:pPr indent="0" marL="0">
+            <a:pPr marL="0" indent="0">
               <a:buNone/>
             </a:pPr>
             <a:r>
@@ -9131,7 +9293,7 @@
           <a:bodyPr wrap="square" rtlCol="0" anchor="ctr"/>
           <a:lstStyle/>
           <a:p>
-            <a:pPr indent="0" marL="0">
+            <a:pPr marL="0" indent="0">
               <a:buNone/>
             </a:pPr>
             <a:r>
@@ -9167,7 +9329,7 @@
           <a:bodyPr wrap="square" rtlCol="0" anchor="ctr"/>
           <a:lstStyle/>
           <a:p>
-            <a:pPr indent="0" marL="0">
+            <a:pPr marL="0" indent="0">
               <a:buNone/>
             </a:pPr>
             <a:r>
@@ -9203,7 +9365,7 @@
           <a:bodyPr wrap="square" rtlCol="0" anchor="ctr"/>
           <a:lstStyle/>
           <a:p>
-            <a:pPr indent="0" marL="0">
+            <a:pPr marL="0" indent="0">
               <a:buNone/>
             </a:pPr>
             <a:r>
@@ -9239,7 +9401,7 @@
           <a:bodyPr wrap="square" rtlCol="0" anchor="ctr"/>
           <a:lstStyle/>
           <a:p>
-            <a:pPr indent="0" marL="0">
+            <a:pPr marL="0" indent="0">
               <a:buNone/>
             </a:pPr>
             <a:r>
@@ -9256,7 +9418,7 @@
             <a:endParaRPr lang="en-US" sz="1400" dirty="0"/>
           </a:p>
           <a:p>
-            <a:pPr indent="0" marL="0">
+            <a:pPr marL="0" indent="0">
               <a:buNone/>
             </a:pPr>
             <a:r>
@@ -9273,7 +9435,7 @@
             <a:endParaRPr lang="en-US" sz="1400" dirty="0"/>
           </a:p>
           <a:p>
-            <a:pPr indent="0" marL="0">
+            <a:pPr marL="0" indent="0">
               <a:buNone/>
             </a:pPr>
             <a:r>
@@ -9290,7 +9452,7 @@
             <a:endParaRPr lang="en-US" sz="1400" dirty="0"/>
           </a:p>
           <a:p>
-            <a:pPr indent="0" marL="0">
+            <a:pPr marL="0" indent="0">
               <a:buNone/>
             </a:pPr>
             <a:r>
@@ -9609,4 +9771,319 @@
     </a:ext>
   </a:extLst>
 </a:theme>
+</file>
+
+<file path=ppt/theme/theme2.xml><?xml version="1.0" encoding="utf-8"?>
+<a:theme xmlns:a="http://schemas.openxmlformats.org/drawingml/2006/main" name="Tema de Office">
+  <a:themeElements>
+    <a:clrScheme name="Office">
+      <a:dk1>
+        <a:sysClr val="windowText" lastClr="000000"/>
+      </a:dk1>
+      <a:lt1>
+        <a:sysClr val="window" lastClr="FFFFFF"/>
+      </a:lt1>
+      <a:dk2>
+        <a:srgbClr val="0E2841"/>
+      </a:dk2>
+      <a:lt2>
+        <a:srgbClr val="E8E8E8"/>
+      </a:lt2>
+      <a:accent1>
+        <a:srgbClr val="156082"/>
+      </a:accent1>
+      <a:accent2>
+        <a:srgbClr val="E97132"/>
+      </a:accent2>
+      <a:accent3>
+        <a:srgbClr val="196B24"/>
+      </a:accent3>
+      <a:accent4>
+        <a:srgbClr val="0F9ED5"/>
+      </a:accent4>
+      <a:accent5>
+        <a:srgbClr val="A02B93"/>
+      </a:accent5>
+      <a:accent6>
+        <a:srgbClr val="4EA72E"/>
+      </a:accent6>
+      <a:hlink>
+        <a:srgbClr val="467886"/>
+      </a:hlink>
+      <a:folHlink>
+        <a:srgbClr val="96607D"/>
+      </a:folHlink>
+    </a:clrScheme>
+    <a:fontScheme name="Office">
+      <a:majorFont>
+        <a:latin typeface="Aptos Display" panose="02110004020202020204"/>
+        <a:ea typeface=""/>
+        <a:cs typeface=""/>
+        <a:font script="Jpan" typeface="游ゴシック Light"/>
+        <a:font script="Hang" typeface="맑은 고딕"/>
+        <a:font script="Hans" typeface="等线 Light"/>
+        <a:font script="Hant" typeface="新細明體"/>
+        <a:font script="Arab" typeface="Times New Roman"/>
+        <a:font script="Hebr" typeface="Times New Roman"/>
+        <a:font script="Thai" typeface="Angsana New"/>
+        <a:font script="Ethi" typeface="Nyala"/>
+        <a:font script="Beng" typeface="Vrinda"/>
+        <a:font script="Gujr" typeface="Shruti"/>
+        <a:font script="Khmr" typeface="MoolBoran"/>
+        <a:font script="Knda" typeface="Tunga"/>
+        <a:font script="Guru" typeface="Raavi"/>
+        <a:font script="Cans" typeface="Euphemia"/>
+        <a:font script="Cher" typeface="Plantagenet Cherokee"/>
+        <a:font script="Yiii" typeface="Microsoft Yi Baiti"/>
+        <a:font script="Tibt" typeface="Microsoft Himalaya"/>
+        <a:font script="Thaa" typeface="MV Boli"/>
+        <a:font script="Deva" typeface="Mangal"/>
+        <a:font script="Telu" typeface="Gautami"/>
+        <a:font script="Taml" typeface="Latha"/>
+        <a:font script="Syrc" typeface="Estrangelo Edessa"/>
+        <a:font script="Orya" typeface="Kalinga"/>
+        <a:font script="Mlym" typeface="Kartika"/>
+        <a:font script="Laoo" typeface="DokChampa"/>
+        <a:font script="Sinh" typeface="Iskoola Pota"/>
+        <a:font script="Mong" typeface="Mongolian Baiti"/>
+        <a:font script="Viet" typeface="Times New Roman"/>
+        <a:font script="Uigh" typeface="Microsoft Uighur"/>
+        <a:font script="Geor" typeface="Sylfaen"/>
+        <a:font script="Armn" typeface="Arial"/>
+        <a:font script="Bugi" typeface="Leelawadee UI"/>
+        <a:font script="Bopo" typeface="Microsoft JhengHei"/>
+        <a:font script="Java" typeface="Javanese Text"/>
+        <a:font script="Lisu" typeface="Segoe UI"/>
+        <a:font script="Mymr" typeface="Myanmar Text"/>
+        <a:font script="Nkoo" typeface="Ebrima"/>
+        <a:font script="Olck" typeface="Nirmala UI"/>
+        <a:font script="Osma" typeface="Ebrima"/>
+        <a:font script="Phag" typeface="Phagspa"/>
+        <a:font script="Syrn" typeface="Estrangelo Edessa"/>
+        <a:font script="Syrj" typeface="Estrangelo Edessa"/>
+        <a:font script="Syre" typeface="Estrangelo Edessa"/>
+        <a:font script="Sora" typeface="Nirmala UI"/>
+        <a:font script="Tale" typeface="Microsoft Tai Le"/>
+        <a:font script="Talu" typeface="Microsoft New Tai Lue"/>
+        <a:font script="Tfng" typeface="Ebrima"/>
+      </a:majorFont>
+      <a:minorFont>
+        <a:latin typeface="Aptos" panose="02110004020202020204"/>
+        <a:ea typeface=""/>
+        <a:cs typeface=""/>
+        <a:font script="Jpan" typeface="游ゴシック"/>
+        <a:font script="Hang" typeface="맑은 고딕"/>
+        <a:font script="Hans" typeface="等线"/>
+        <a:font script="Hant" typeface="新細明體"/>
+        <a:font script="Arab" typeface="Arial"/>
+        <a:font script="Hebr" typeface="Arial"/>
+        <a:font script="Thai" typeface="Cordia New"/>
+        <a:font script="Ethi" typeface="Nyala"/>
+        <a:font script="Beng" typeface="Vrinda"/>
+        <a:font script="Gujr" typeface="Shruti"/>
+        <a:font script="Khmr" typeface="DaunPenh"/>
+        <a:font script="Knda" typeface="Tunga"/>
+        <a:font script="Guru" typeface="Raavi"/>
+        <a:font script="Cans" typeface="Euphemia"/>
+        <a:font script="Cher" typeface="Plantagenet Cherokee"/>
+        <a:font script="Yiii" typeface="Microsoft Yi Baiti"/>
+        <a:font script="Tibt" typeface="Microsoft Himalaya"/>
+        <a:font script="Thaa" typeface="MV Boli"/>
+        <a:font script="Deva" typeface="Mangal"/>
+        <a:font script="Telu" typeface="Gautami"/>
+        <a:font script="Taml" typeface="Latha"/>
+        <a:font script="Syrc" typeface="Estrangelo Edessa"/>
+        <a:font script="Orya" typeface="Kalinga"/>
+        <a:font script="Mlym" typeface="Kartika"/>
+        <a:font script="Laoo" typeface="DokChampa"/>
+        <a:font script="Sinh" typeface="Iskoola Pota"/>
+        <a:font script="Mong" typeface="Mongolian Baiti"/>
+        <a:font script="Viet" typeface="Arial"/>
+        <a:font script="Uigh" typeface="Microsoft Uighur"/>
+        <a:font script="Geor" typeface="Sylfaen"/>
+        <a:font script="Armn" typeface="Arial"/>
+        <a:font script="Bugi" typeface="Leelawadee UI"/>
+        <a:font script="Bopo" typeface="Microsoft JhengHei"/>
+        <a:font script="Java" typeface="Javanese Text"/>
+        <a:font script="Lisu" typeface="Segoe UI"/>
+        <a:font script="Mymr" typeface="Myanmar Text"/>
+        <a:font script="Nkoo" typeface="Ebrima"/>
+        <a:font script="Olck" typeface="Nirmala UI"/>
+        <a:font script="Osma" typeface="Ebrima"/>
+        <a:font script="Phag" typeface="Phagspa"/>
+        <a:font script="Syrn" typeface="Estrangelo Edessa"/>
+        <a:font script="Syrj" typeface="Estrangelo Edessa"/>
+        <a:font script="Syre" typeface="Estrangelo Edessa"/>
+        <a:font script="Sora" typeface="Nirmala UI"/>
+        <a:font script="Tale" typeface="Microsoft Tai Le"/>
+        <a:font script="Talu" typeface="Microsoft New Tai Lue"/>
+        <a:font script="Tfng" typeface="Ebrima"/>
+      </a:minorFont>
+    </a:fontScheme>
+    <a:fmtScheme name="Office">
+      <a:fillStyleLst>
+        <a:solidFill>
+          <a:schemeClr val="phClr"/>
+        </a:solidFill>
+        <a:gradFill rotWithShape="1">
+          <a:gsLst>
+            <a:gs pos="0">
+              <a:schemeClr val="phClr">
+                <a:lumMod val="110000"/>
+                <a:satMod val="105000"/>
+                <a:tint val="67000"/>
+              </a:schemeClr>
+            </a:gs>
+            <a:gs pos="50000">
+              <a:schemeClr val="phClr">
+                <a:lumMod val="105000"/>
+                <a:satMod val="103000"/>
+                <a:tint val="73000"/>
+              </a:schemeClr>
+            </a:gs>
+            <a:gs pos="100000">
+              <a:schemeClr val="phClr">
+                <a:lumMod val="105000"/>
+                <a:satMod val="109000"/>
+                <a:tint val="81000"/>
+              </a:schemeClr>
+            </a:gs>
+          </a:gsLst>
+          <a:lin ang="5400000" scaled="0"/>
+        </a:gradFill>
+        <a:gradFill rotWithShape="1">
+          <a:gsLst>
+            <a:gs pos="0">
+              <a:schemeClr val="phClr">
+                <a:satMod val="103000"/>
+                <a:lumMod val="102000"/>
+                <a:tint val="94000"/>
+              </a:schemeClr>
+            </a:gs>
+            <a:gs pos="50000">
+              <a:schemeClr val="phClr">
+                <a:satMod val="110000"/>
+                <a:lumMod val="100000"/>
+                <a:shade val="100000"/>
+              </a:schemeClr>
+            </a:gs>
+            <a:gs pos="100000">
+              <a:schemeClr val="phClr">
+                <a:lumMod val="99000"/>
+                <a:satMod val="120000"/>
+                <a:shade val="78000"/>
+              </a:schemeClr>
+            </a:gs>
+          </a:gsLst>
+          <a:lin ang="5400000" scaled="0"/>
+        </a:gradFill>
+      </a:fillStyleLst>
+      <a:lnStyleLst>
+        <a:ln w="12700" cap="flat" cmpd="sng" algn="ctr">
+          <a:solidFill>
+            <a:schemeClr val="phClr"/>
+          </a:solidFill>
+          <a:prstDash val="solid"/>
+          <a:miter lim="800000"/>
+        </a:ln>
+        <a:ln w="19050" cap="flat" cmpd="sng" algn="ctr">
+          <a:solidFill>
+            <a:schemeClr val="phClr"/>
+          </a:solidFill>
+          <a:prstDash val="solid"/>
+          <a:miter lim="800000"/>
+        </a:ln>
+        <a:ln w="25400" cap="flat" cmpd="sng" algn="ctr">
+          <a:solidFill>
+            <a:schemeClr val="phClr"/>
+          </a:solidFill>
+          <a:prstDash val="solid"/>
+          <a:miter lim="800000"/>
+        </a:ln>
+      </a:lnStyleLst>
+      <a:effectStyleLst>
+        <a:effectStyle>
+          <a:effectLst/>
+        </a:effectStyle>
+        <a:effectStyle>
+          <a:effectLst/>
+        </a:effectStyle>
+        <a:effectStyle>
+          <a:effectLst>
+            <a:outerShdw blurRad="57150" dist="19050" dir="5400000" algn="ctr" rotWithShape="0">
+              <a:srgbClr val="000000">
+                <a:alpha val="63000"/>
+              </a:srgbClr>
+            </a:outerShdw>
+          </a:effectLst>
+        </a:effectStyle>
+      </a:effectStyleLst>
+      <a:bgFillStyleLst>
+        <a:solidFill>
+          <a:schemeClr val="phClr"/>
+        </a:solidFill>
+        <a:solidFill>
+          <a:schemeClr val="phClr">
+            <a:tint val="95000"/>
+            <a:satMod val="170000"/>
+          </a:schemeClr>
+        </a:solidFill>
+        <a:gradFill rotWithShape="1">
+          <a:gsLst>
+            <a:gs pos="0">
+              <a:schemeClr val="phClr">
+                <a:tint val="93000"/>
+                <a:satMod val="150000"/>
+                <a:shade val="98000"/>
+                <a:lumMod val="102000"/>
+              </a:schemeClr>
+            </a:gs>
+            <a:gs pos="50000">
+              <a:schemeClr val="phClr">
+                <a:tint val="98000"/>
+                <a:satMod val="130000"/>
+                <a:shade val="90000"/>
+                <a:lumMod val="103000"/>
+              </a:schemeClr>
+            </a:gs>
+            <a:gs pos="100000">
+              <a:schemeClr val="phClr">
+                <a:shade val="63000"/>
+                <a:satMod val="120000"/>
+              </a:schemeClr>
+            </a:gs>
+          </a:gsLst>
+          <a:lin ang="5400000" scaled="0"/>
+        </a:gradFill>
+      </a:bgFillStyleLst>
+    </a:fmtScheme>
+  </a:themeElements>
+  <a:objectDefaults>
+    <a:lnDef>
+      <a:spPr/>
+      <a:bodyPr/>
+      <a:lstStyle/>
+      <a:style>
+        <a:lnRef idx="2">
+          <a:schemeClr val="accent1"/>
+        </a:lnRef>
+        <a:fillRef idx="0">
+          <a:schemeClr val="accent1"/>
+        </a:fillRef>
+        <a:effectRef idx="1">
+          <a:schemeClr val="accent1"/>
+        </a:effectRef>
+        <a:fontRef idx="minor">
+          <a:schemeClr val="tx1"/>
+        </a:fontRef>
+      </a:style>
+    </a:lnDef>
+  </a:objectDefaults>
+  <a:extraClrSchemeLst/>
+  <a:extLst>
+    <a:ext uri="{05A4C25C-085E-4340-85A3-A5531E510DB2}">
+      <thm15:themeFamily xmlns:thm15="http://schemas.microsoft.com/office/thememl/2012/main" name="Office Theme" id="{2E142A2C-CD16-42D6-873A-C26D2A0506FA}" vid="{1BDDFF52-6CD6-40A5-AB3C-68EB2F1E4D0A}"/>
+    </a:ext>
+  </a:extLst>
+</a:theme>
 </file>